--- a/16_RC4/16_RC4_Corrige.pptx
+++ b/16_RC4/16_RC4_Corrige.pptx
@@ -9,6 +9,8 @@
     <p:sldId id="265" r:id="rId3"/>
     <p:sldId id="266" r:id="rId4"/>
     <p:sldId id="267" r:id="rId5"/>
+    <p:sldId id="268" r:id="rId6"/>
+    <p:sldId id="269" r:id="rId7"/>
   </p:sldIdLst>
   <p:sldSz cx="12192000" cy="6858000"/>
   <p:notesSz cx="6858000" cy="9144000"/>
@@ -183,6 +185,13 @@
             <a:schemeClr val="lt1"/>
           </a:fontRef>
         </p:style>
+        <p:txBody>
+          <a:bodyPr/>
+          <a:lstStyle/>
+          <a:p>
+            <a:endParaRPr lang="fr-FR"/>
+          </a:p>
+        </p:txBody>
       </p:sp>
       <p:sp>
         <p:nvSpPr>
@@ -221,6 +230,13 @@
             <a:schemeClr val="lt1"/>
           </a:fontRef>
         </p:style>
+        <p:txBody>
+          <a:bodyPr/>
+          <a:lstStyle/>
+          <a:p>
+            <a:endParaRPr lang="fr-FR"/>
+          </a:p>
+        </p:txBody>
       </p:sp>
       <p:sp>
         <p:nvSpPr>
@@ -355,7 +371,7 @@
           <a:p>
             <a:fld id="{D7F135F6-2A09-4FDD-9ECA-096E230CA0FA}" type="datetimeFigureOut">
               <a:rPr lang="fr-FR" smtClean="0"/>
-              <a:t>06/04/2023</a:t>
+              <a:t>06/04/2026</a:t>
             </a:fld>
             <a:endParaRPr lang="fr-FR"/>
           </a:p>
@@ -560,7 +576,7 @@
           <a:p>
             <a:fld id="{D7F135F6-2A09-4FDD-9ECA-096E230CA0FA}" type="datetimeFigureOut">
               <a:rPr lang="fr-FR" smtClean="0"/>
-              <a:t>06/04/2023</a:t>
+              <a:t>06/04/2026</a:t>
             </a:fld>
             <a:endParaRPr lang="fr-FR"/>
           </a:p>
@@ -816,7 +832,7 @@
           <a:p>
             <a:fld id="{D7F135F6-2A09-4FDD-9ECA-096E230CA0FA}" type="datetimeFigureOut">
               <a:rPr lang="fr-FR" smtClean="0"/>
-              <a:t>06/04/2023</a:t>
+              <a:t>06/04/2026</a:t>
             </a:fld>
             <a:endParaRPr lang="fr-FR"/>
           </a:p>
@@ -1022,7 +1038,7 @@
           <a:p>
             <a:fld id="{D7F135F6-2A09-4FDD-9ECA-096E230CA0FA}" type="datetimeFigureOut">
               <a:rPr lang="fr-FR" smtClean="0"/>
-              <a:t>06/04/2023</a:t>
+              <a:t>06/04/2026</a:t>
             </a:fld>
             <a:endParaRPr lang="fr-FR"/>
           </a:p>
@@ -1384,7 +1400,7 @@
           <a:p>
             <a:fld id="{D7F135F6-2A09-4FDD-9ECA-096E230CA0FA}" type="datetimeFigureOut">
               <a:rPr lang="fr-FR" smtClean="0"/>
-              <a:t>06/04/2023</a:t>
+              <a:t>06/04/2026</a:t>
             </a:fld>
             <a:endParaRPr lang="fr-FR"/>
           </a:p>
@@ -1659,7 +1675,7 @@
           <a:p>
             <a:fld id="{D7F135F6-2A09-4FDD-9ECA-096E230CA0FA}" type="datetimeFigureOut">
               <a:rPr lang="fr-FR" smtClean="0"/>
-              <a:t>06/04/2023</a:t>
+              <a:t>06/04/2026</a:t>
             </a:fld>
             <a:endParaRPr lang="fr-FR"/>
           </a:p>
@@ -2038,7 +2054,7 @@
           <a:p>
             <a:fld id="{D7F135F6-2A09-4FDD-9ECA-096E230CA0FA}" type="datetimeFigureOut">
               <a:rPr lang="fr-FR" smtClean="0"/>
-              <a:t>06/04/2023</a:t>
+              <a:t>06/04/2026</a:t>
             </a:fld>
             <a:endParaRPr lang="fr-FR"/>
           </a:p>
@@ -2156,7 +2172,7 @@
           <a:p>
             <a:fld id="{D7F135F6-2A09-4FDD-9ECA-096E230CA0FA}" type="datetimeFigureOut">
               <a:rPr lang="fr-FR" smtClean="0"/>
-              <a:t>06/04/2023</a:t>
+              <a:t>06/04/2026</a:t>
             </a:fld>
             <a:endParaRPr lang="fr-FR"/>
           </a:p>
@@ -2330,7 +2346,7 @@
           <a:p>
             <a:fld id="{D7F135F6-2A09-4FDD-9ECA-096E230CA0FA}" type="datetimeFigureOut">
               <a:rPr lang="fr-FR" smtClean="0"/>
-              <a:t>06/04/2023</a:t>
+              <a:t>06/04/2026</a:t>
             </a:fld>
             <a:endParaRPr lang="fr-FR"/>
           </a:p>
@@ -2687,7 +2703,7 @@
           <a:p>
             <a:fld id="{D7F135F6-2A09-4FDD-9ECA-096E230CA0FA}" type="datetimeFigureOut">
               <a:rPr lang="fr-FR" smtClean="0"/>
-              <a:t>06/04/2023</a:t>
+              <a:t>06/04/2026</a:t>
             </a:fld>
             <a:endParaRPr lang="fr-FR"/>
           </a:p>
@@ -3072,7 +3088,7 @@
           <a:p>
             <a:fld id="{D7F135F6-2A09-4FDD-9ECA-096E230CA0FA}" type="datetimeFigureOut">
               <a:rPr lang="fr-FR" smtClean="0"/>
-              <a:t>06/04/2023</a:t>
+              <a:t>06/04/2026</a:t>
             </a:fld>
             <a:endParaRPr lang="fr-FR"/>
           </a:p>
@@ -3195,6 +3211,13 @@
             <a:schemeClr val="lt1"/>
           </a:fontRef>
         </p:style>
+        <p:txBody>
+          <a:bodyPr/>
+          <a:lstStyle/>
+          <a:p>
+            <a:endParaRPr lang="fr-FR"/>
+          </a:p>
+        </p:txBody>
       </p:sp>
       <p:sp>
         <p:nvSpPr>
@@ -3233,6 +3256,13 @@
             <a:schemeClr val="lt1"/>
           </a:fontRef>
         </p:style>
+        <p:txBody>
+          <a:bodyPr/>
+          <a:lstStyle/>
+          <a:p>
+            <a:endParaRPr lang="fr-FR"/>
+          </a:p>
+        </p:txBody>
       </p:sp>
       <p:sp>
         <p:nvSpPr>
@@ -3362,7 +3392,7 @@
           <a:p>
             <a:fld id="{D7F135F6-2A09-4FDD-9ECA-096E230CA0FA}" type="datetimeFigureOut">
               <a:rPr lang="fr-FR" smtClean="0"/>
-              <a:t>06/04/2023</a:t>
+              <a:t>06/04/2026</a:t>
             </a:fld>
             <a:endParaRPr lang="fr-FR" dirty="0"/>
           </a:p>
@@ -6072,19 +6102,18 @@
             </p:cNvPr>
             <p:cNvCxnSpPr>
               <a:cxnSpLocks/>
-              <a:stCxn id="10" idx="3"/>
-              <a:endCxn id="45" idx="3"/>
+              <a:endCxn id="45" idx="0"/>
             </p:cNvCxnSpPr>
             <p:nvPr/>
           </p:nvCxnSpPr>
           <p:spPr>
-            <a:xfrm flipH="1">
-              <a:off x="6795600" y="1708801"/>
-              <a:ext cx="33719" cy="1346496"/>
+            <a:xfrm rot="16200000" flipH="1">
+              <a:off x="4217106" y="2257589"/>
+              <a:ext cx="1041768" cy="146792"/>
             </a:xfrm>
             <a:prstGeom prst="bentConnector3">
               <a:avLst>
-                <a:gd name="adj1" fmla="val -1067152"/>
+                <a:gd name="adj1" fmla="val -1201"/>
               </a:avLst>
             </a:prstGeom>
             <a:ln w="25400">
@@ -6124,7 +6153,7 @@
           </p:nvSpPr>
           <p:spPr>
             <a:xfrm>
-              <a:off x="5389319" y="2889618"/>
+              <a:off x="4108245" y="2851869"/>
               <a:ext cx="1406281" cy="331358"/>
             </a:xfrm>
             <a:prstGeom prst="roundRect">
@@ -6190,8 +6219,8 @@
           </p:nvCxnSpPr>
           <p:spPr>
             <a:xfrm rot="10800000" flipV="1">
-              <a:off x="3938895" y="3055297"/>
-              <a:ext cx="1450425" cy="377472"/>
+              <a:off x="3938895" y="3017547"/>
+              <a:ext cx="169351" cy="415221"/>
             </a:xfrm>
             <a:prstGeom prst="bentConnector2">
               <a:avLst/>
@@ -6843,8 +6872,8 @@
             </a:prstGeom>
           </p:spPr>
         </p:pic>
-        <mc:AlternateContent xmlns:mc="http://schemas.openxmlformats.org/markup-compatibility/2006">
-          <mc:Choice xmlns:a14="http://schemas.microsoft.com/office/drawing/2010/main" Requires="a14">
+        <mc:AlternateContent xmlns:mc="http://schemas.openxmlformats.org/markup-compatibility/2006" xmlns:a14="http://schemas.microsoft.com/office/drawing/2010/main">
+          <mc:Choice Requires="a14">
             <p:sp>
               <p:nvSpPr>
                 <p:cNvPr id="64" name="ZoneTexte 63">
@@ -6908,7 +6937,7 @@
               </p:txBody>
             </p:sp>
           </mc:Choice>
-          <mc:Fallback>
+          <mc:Fallback xmlns="">
             <p:sp>
               <p:nvSpPr>
                 <p:cNvPr id="64" name="ZoneTexte 63">
@@ -6970,7 +6999,7 @@
               <p:spPr>
                 <a:xfrm>
                   <a:off x="4443619" y="3709151"/>
-                  <a:ext cx="1161960" cy="276999"/>
+                  <a:ext cx="1161960" cy="200055"/>
                 </a:xfrm>
                 <a:prstGeom prst="rect">
                   <a:avLst/>
@@ -6985,18 +7014,18 @@
                 <a:p>
                   <a:pPr algn="ctr"/>
                   <a:r>
-                    <a:rPr lang="fr-FR" sz="1200" b="1" dirty="0">
+                    <a:rPr lang="fr-FR" sz="700" b="1" dirty="0">
                       <a:solidFill>
                         <a:srgbClr val="FFB25A"/>
                       </a:solidFill>
                       <a:latin typeface="Arial Nova" panose="020B0504020202020204" pitchFamily="34" charset="0"/>
                     </a:rPr>
-                    <a:t> 18 V </a:t>
+                    <a:t> [-18 V,+18V] </a:t>
                   </a:r>
                   <a14:m>
                     <m:oMath xmlns:m="http://schemas.openxmlformats.org/officeDocument/2006/math">
                       <m:r>
-                        <a:rPr lang="fr-FR" sz="1200" b="1" i="0" smtClean="0">
+                        <a:rPr lang="fr-FR" sz="700" b="1" i="0" smtClean="0">
                           <a:solidFill>
                             <a:srgbClr val="FFB25A"/>
                           </a:solidFill>
@@ -7008,7 +7037,7 @@
                       </m:r>
                     </m:oMath>
                   </a14:m>
-                  <a:endParaRPr lang="fr-FR" sz="1200" b="1" dirty="0">
+                  <a:endParaRPr lang="fr-FR" sz="700" b="1" dirty="0">
                     <a:solidFill>
                       <a:srgbClr val="FFB25A"/>
                     </a:solidFill>
@@ -7036,7 +7065,7 @@
               <p:spPr>
                 <a:xfrm>
                   <a:off x="4443619" y="3709151"/>
-                  <a:ext cx="1161960" cy="276999"/>
+                  <a:ext cx="1161960" cy="200055"/>
                 </a:xfrm>
                 <a:prstGeom prst="rect">
                   <a:avLst/>
@@ -7044,7 +7073,7 @@
                 <a:blipFill>
                   <a:blip r:embed="rId13"/>
                   <a:stretch>
-                    <a:fillRect t="-2222" b="-17778"/>
+                    <a:fillRect b="-3030"/>
                   </a:stretch>
                 </a:blipFill>
               </p:spPr>
@@ -7299,8 +7328,8 @@
             </p:spPr>
           </p:pic>
         </p:grpSp>
-        <mc:AlternateContent xmlns:mc="http://schemas.openxmlformats.org/markup-compatibility/2006">
-          <mc:Choice xmlns:a14="http://schemas.microsoft.com/office/drawing/2010/main" Requires="a14">
+        <mc:AlternateContent xmlns:mc="http://schemas.openxmlformats.org/markup-compatibility/2006" xmlns:a14="http://schemas.microsoft.com/office/drawing/2010/main">
+          <mc:Choice Requires="a14">
             <p:sp>
               <p:nvSpPr>
                 <p:cNvPr id="86" name="ZoneTexte 85">
@@ -7364,7 +7393,7 @@
               </p:txBody>
             </p:sp>
           </mc:Choice>
-          <mc:Fallback>
+          <mc:Fallback xmlns="">
             <p:sp>
               <p:nvSpPr>
                 <p:cNvPr id="86" name="ZoneTexte 85">
@@ -8860,6 +8889,2149 @@
 </p:sld>
 </file>
 
+<file path=ppt/slides/slide5.xml><?xml version="1.0" encoding="utf-8"?>
+<p:sld xmlns:a="http://schemas.openxmlformats.org/drawingml/2006/main" xmlns:r="http://schemas.openxmlformats.org/officeDocument/2006/relationships" xmlns:p="http://schemas.openxmlformats.org/presentationml/2006/main">
+  <p:cSld>
+    <p:spTree>
+      <p:nvGrpSpPr>
+        <p:cNvPr id="1" name=""/>
+        <p:cNvGrpSpPr/>
+        <p:nvPr/>
+      </p:nvGrpSpPr>
+      <p:grpSpPr>
+        <a:xfrm>
+          <a:off x="0" y="0"/>
+          <a:ext cx="0" cy="0"/>
+          <a:chOff x="0" y="0"/>
+          <a:chExt cx="0" cy="0"/>
+        </a:xfrm>
+      </p:grpSpPr>
+      <p:sp>
+        <p:nvSpPr>
+          <p:cNvPr id="2" name="Titre 1">
+            <a:extLst>
+              <a:ext uri="{FF2B5EF4-FFF2-40B4-BE49-F238E27FC236}">
+                <a16:creationId xmlns:a16="http://schemas.microsoft.com/office/drawing/2014/main" id="{72AB29C9-AF8D-248B-C79F-6EBC6C9B52D8}"/>
+              </a:ext>
+            </a:extLst>
+          </p:cNvPr>
+          <p:cNvSpPr>
+            <a:spLocks noGrp="1"/>
+          </p:cNvSpPr>
+          <p:nvPr>
+            <p:ph type="title"/>
+          </p:nvPr>
+        </p:nvSpPr>
+        <p:spPr/>
+        <p:txBody>
+          <a:bodyPr/>
+          <a:lstStyle/>
+          <a:p>
+            <a:endParaRPr lang="fr-FR"/>
+          </a:p>
+        </p:txBody>
+      </p:sp>
+      <p:pic>
+        <p:nvPicPr>
+          <p:cNvPr id="5" name="Espace réservé du contenu 4">
+            <a:extLst>
+              <a:ext uri="{FF2B5EF4-FFF2-40B4-BE49-F238E27FC236}">
+                <a16:creationId xmlns:a16="http://schemas.microsoft.com/office/drawing/2014/main" id="{DAC7487F-90DA-22F5-4FF7-310CFB3BE73B}"/>
+              </a:ext>
+            </a:extLst>
+          </p:cNvPr>
+          <p:cNvPicPr>
+            <a:picLocks noGrp="1" noChangeAspect="1"/>
+          </p:cNvPicPr>
+          <p:nvPr>
+            <p:ph idx="1"/>
+          </p:nvPr>
+        </p:nvPicPr>
+        <p:blipFill>
+          <a:blip r:embed="rId2"/>
+          <a:stretch>
+            <a:fillRect/>
+          </a:stretch>
+        </p:blipFill>
+        <p:spPr>
+          <a:xfrm>
+            <a:off x="264219" y="940088"/>
+            <a:ext cx="3848843" cy="2733621"/>
+          </a:xfrm>
+          <a:prstGeom prst="rect">
+            <a:avLst/>
+          </a:prstGeom>
+        </p:spPr>
+      </p:pic>
+      <p:grpSp>
+        <p:nvGrpSpPr>
+          <p:cNvPr id="6" name="Groupe 5">
+            <a:extLst>
+              <a:ext uri="{FF2B5EF4-FFF2-40B4-BE49-F238E27FC236}">
+                <a16:creationId xmlns:a16="http://schemas.microsoft.com/office/drawing/2014/main" id="{28EB6070-91E4-6AAA-A10D-E4E881C8AAF2}"/>
+              </a:ext>
+            </a:extLst>
+          </p:cNvPr>
+          <p:cNvGrpSpPr/>
+          <p:nvPr/>
+        </p:nvGrpSpPr>
+        <p:grpSpPr>
+          <a:xfrm>
+            <a:off x="-921662" y="3883399"/>
+            <a:ext cx="3819637" cy="2859959"/>
+            <a:chOff x="2676671" y="1721608"/>
+            <a:chExt cx="3819637" cy="2859959"/>
+          </a:xfrm>
+        </p:grpSpPr>
+        <p:grpSp>
+          <p:nvGrpSpPr>
+            <p:cNvPr id="7" name="Groupe 6">
+              <a:extLst>
+                <a:ext uri="{FF2B5EF4-FFF2-40B4-BE49-F238E27FC236}">
+                  <a16:creationId xmlns:a16="http://schemas.microsoft.com/office/drawing/2014/main" id="{94468E44-0481-1202-3E49-A8FDA30F97D7}"/>
+                </a:ext>
+              </a:extLst>
+            </p:cNvPr>
+            <p:cNvGrpSpPr/>
+            <p:nvPr/>
+          </p:nvGrpSpPr>
+          <p:grpSpPr>
+            <a:xfrm>
+              <a:off x="3503285" y="1721608"/>
+              <a:ext cx="2993023" cy="2859959"/>
+              <a:chOff x="-180530" y="281011"/>
+              <a:chExt cx="2993023" cy="2859959"/>
+            </a:xfrm>
+          </p:grpSpPr>
+          <p:grpSp>
+            <p:nvGrpSpPr>
+              <p:cNvPr id="25" name="Groupe 24">
+                <a:extLst>
+                  <a:ext uri="{FF2B5EF4-FFF2-40B4-BE49-F238E27FC236}">
+                    <a16:creationId xmlns:a16="http://schemas.microsoft.com/office/drawing/2014/main" id="{D13B9F4D-A3B6-B7B8-D2B4-6438A08B28B6}"/>
+                  </a:ext>
+                </a:extLst>
+              </p:cNvPr>
+              <p:cNvGrpSpPr/>
+              <p:nvPr/>
+            </p:nvGrpSpPr>
+            <p:grpSpPr>
+              <a:xfrm rot="20700000">
+                <a:off x="780713" y="386845"/>
+                <a:ext cx="1440160" cy="1440160"/>
+                <a:chOff x="971600" y="548680"/>
+                <a:chExt cx="1440160" cy="1440160"/>
+              </a:xfrm>
+            </p:grpSpPr>
+            <p:cxnSp>
+              <p:nvCxnSpPr>
+                <p:cNvPr id="39" name="Connecteur droit 38">
+                  <a:extLst>
+                    <a:ext uri="{FF2B5EF4-FFF2-40B4-BE49-F238E27FC236}">
+                      <a16:creationId xmlns:a16="http://schemas.microsoft.com/office/drawing/2014/main" id="{7288C30B-212B-DE08-7ACF-08A09EBA92E7}"/>
+                    </a:ext>
+                  </a:extLst>
+                </p:cNvPr>
+                <p:cNvCxnSpPr/>
+                <p:nvPr/>
+              </p:nvCxnSpPr>
+              <p:spPr>
+                <a:xfrm flipV="1">
+                  <a:off x="971600" y="548680"/>
+                  <a:ext cx="0" cy="1440160"/>
+                </a:xfrm>
+                <a:prstGeom prst="line">
+                  <a:avLst/>
+                </a:prstGeom>
+                <a:ln w="19050">
+                  <a:solidFill>
+                    <a:srgbClr val="7030A0"/>
+                  </a:solidFill>
+                  <a:tailEnd type="stealth" w="med" len="lg"/>
+                </a:ln>
+              </p:spPr>
+              <p:style>
+                <a:lnRef idx="1">
+                  <a:schemeClr val="accent1"/>
+                </a:lnRef>
+                <a:fillRef idx="0">
+                  <a:schemeClr val="accent1"/>
+                </a:fillRef>
+                <a:effectRef idx="0">
+                  <a:schemeClr val="accent1"/>
+                </a:effectRef>
+                <a:fontRef idx="minor">
+                  <a:schemeClr val="tx1"/>
+                </a:fontRef>
+              </p:style>
+            </p:cxnSp>
+            <p:cxnSp>
+              <p:nvCxnSpPr>
+                <p:cNvPr id="40" name="Connecteur droit 39">
+                  <a:extLst>
+                    <a:ext uri="{FF2B5EF4-FFF2-40B4-BE49-F238E27FC236}">
+                      <a16:creationId xmlns:a16="http://schemas.microsoft.com/office/drawing/2014/main" id="{BA65F9D4-1B49-8A02-F9D3-86A09ACD7F4C}"/>
+                    </a:ext>
+                  </a:extLst>
+                </p:cNvPr>
+                <p:cNvCxnSpPr>
+                  <a:cxnSpLocks/>
+                </p:cNvCxnSpPr>
+                <p:nvPr/>
+              </p:nvCxnSpPr>
+              <p:spPr>
+                <a:xfrm rot="5400000" flipV="1">
+                  <a:off x="1691680" y="1268760"/>
+                  <a:ext cx="0" cy="1440160"/>
+                </a:xfrm>
+                <a:prstGeom prst="line">
+                  <a:avLst/>
+                </a:prstGeom>
+                <a:ln w="19050">
+                  <a:solidFill>
+                    <a:srgbClr val="7030A0"/>
+                  </a:solidFill>
+                  <a:tailEnd type="stealth" w="med" len="lg"/>
+                </a:ln>
+              </p:spPr>
+              <p:style>
+                <a:lnRef idx="1">
+                  <a:schemeClr val="accent1"/>
+                </a:lnRef>
+                <a:fillRef idx="0">
+                  <a:schemeClr val="accent1"/>
+                </a:fillRef>
+                <a:effectRef idx="0">
+                  <a:schemeClr val="accent1"/>
+                </a:effectRef>
+                <a:fontRef idx="minor">
+                  <a:schemeClr val="tx1"/>
+                </a:fontRef>
+              </p:style>
+            </p:cxnSp>
+          </p:grpSp>
+          <p:grpSp>
+            <p:nvGrpSpPr>
+              <p:cNvPr id="26" name="Groupe 25">
+                <a:extLst>
+                  <a:ext uri="{FF2B5EF4-FFF2-40B4-BE49-F238E27FC236}">
+                    <a16:creationId xmlns:a16="http://schemas.microsoft.com/office/drawing/2014/main" id="{893347D0-760B-EDAC-C413-CEF8F584CBED}"/>
+                  </a:ext>
+                </a:extLst>
+              </p:cNvPr>
+              <p:cNvGrpSpPr/>
+              <p:nvPr/>
+            </p:nvGrpSpPr>
+            <p:grpSpPr>
+              <a:xfrm>
+                <a:off x="971600" y="548680"/>
+                <a:ext cx="1440160" cy="1440160"/>
+                <a:chOff x="971600" y="548680"/>
+                <a:chExt cx="1440160" cy="1440160"/>
+              </a:xfrm>
+            </p:grpSpPr>
+            <p:cxnSp>
+              <p:nvCxnSpPr>
+                <p:cNvPr id="37" name="Connecteur droit 36">
+                  <a:extLst>
+                    <a:ext uri="{FF2B5EF4-FFF2-40B4-BE49-F238E27FC236}">
+                      <a16:creationId xmlns:a16="http://schemas.microsoft.com/office/drawing/2014/main" id="{83F93DCA-2F0E-A66B-DC8A-9EF25B38B07F}"/>
+                    </a:ext>
+                  </a:extLst>
+                </p:cNvPr>
+                <p:cNvCxnSpPr/>
+                <p:nvPr/>
+              </p:nvCxnSpPr>
+              <p:spPr>
+                <a:xfrm flipV="1">
+                  <a:off x="971600" y="548680"/>
+                  <a:ext cx="0" cy="1440160"/>
+                </a:xfrm>
+                <a:prstGeom prst="line">
+                  <a:avLst/>
+                </a:prstGeom>
+                <a:ln w="19050">
+                  <a:solidFill>
+                    <a:schemeClr val="tx1"/>
+                  </a:solidFill>
+                  <a:tailEnd type="stealth" w="med" len="lg"/>
+                </a:ln>
+              </p:spPr>
+              <p:style>
+                <a:lnRef idx="1">
+                  <a:schemeClr val="accent1"/>
+                </a:lnRef>
+                <a:fillRef idx="0">
+                  <a:schemeClr val="accent1"/>
+                </a:fillRef>
+                <a:effectRef idx="0">
+                  <a:schemeClr val="accent1"/>
+                </a:effectRef>
+                <a:fontRef idx="minor">
+                  <a:schemeClr val="tx1"/>
+                </a:fontRef>
+              </p:style>
+            </p:cxnSp>
+            <p:cxnSp>
+              <p:nvCxnSpPr>
+                <p:cNvPr id="38" name="Connecteur droit 37">
+                  <a:extLst>
+                    <a:ext uri="{FF2B5EF4-FFF2-40B4-BE49-F238E27FC236}">
+                      <a16:creationId xmlns:a16="http://schemas.microsoft.com/office/drawing/2014/main" id="{A1350456-3220-C56E-09A5-E495AF360D3B}"/>
+                    </a:ext>
+                  </a:extLst>
+                </p:cNvPr>
+                <p:cNvCxnSpPr>
+                  <a:cxnSpLocks/>
+                </p:cNvCxnSpPr>
+                <p:nvPr/>
+              </p:nvCxnSpPr>
+              <p:spPr>
+                <a:xfrm rot="5400000" flipV="1">
+                  <a:off x="1691680" y="1268760"/>
+                  <a:ext cx="0" cy="1440160"/>
+                </a:xfrm>
+                <a:prstGeom prst="line">
+                  <a:avLst/>
+                </a:prstGeom>
+                <a:ln w="19050">
+                  <a:solidFill>
+                    <a:schemeClr val="tx1"/>
+                  </a:solidFill>
+                  <a:tailEnd type="stealth" w="med" len="lg"/>
+                </a:ln>
+              </p:spPr>
+              <p:style>
+                <a:lnRef idx="1">
+                  <a:schemeClr val="accent1"/>
+                </a:lnRef>
+                <a:fillRef idx="0">
+                  <a:schemeClr val="accent1"/>
+                </a:fillRef>
+                <a:effectRef idx="0">
+                  <a:schemeClr val="accent1"/>
+                </a:effectRef>
+                <a:fontRef idx="minor">
+                  <a:schemeClr val="tx1"/>
+                </a:fontRef>
+              </p:style>
+            </p:cxnSp>
+          </p:grpSp>
+          <p:sp>
+            <p:nvSpPr>
+              <p:cNvPr id="27" name="Ellipse 26">
+                <a:extLst>
+                  <a:ext uri="{FF2B5EF4-FFF2-40B4-BE49-F238E27FC236}">
+                    <a16:creationId xmlns:a16="http://schemas.microsoft.com/office/drawing/2014/main" id="{D7A1836B-F3BB-FC1D-0FC1-F0ECDA4B6BBD}"/>
+                  </a:ext>
+                </a:extLst>
+              </p:cNvPr>
+              <p:cNvSpPr/>
+              <p:nvPr/>
+            </p:nvSpPr>
+            <p:spPr>
+              <a:xfrm>
+                <a:off x="873610" y="1869528"/>
+                <a:ext cx="216000" cy="216000"/>
+              </a:xfrm>
+              <a:prstGeom prst="ellipse">
+                <a:avLst/>
+              </a:prstGeom>
+              <a:solidFill>
+                <a:schemeClr val="bg1"/>
+              </a:solidFill>
+              <a:ln w="19050">
+                <a:solidFill>
+                  <a:schemeClr val="tx1"/>
+                </a:solidFill>
+              </a:ln>
+            </p:spPr>
+            <p:style>
+              <a:lnRef idx="2">
+                <a:schemeClr val="accent1">
+                  <a:shade val="50000"/>
+                </a:schemeClr>
+              </a:lnRef>
+              <a:fillRef idx="1">
+                <a:schemeClr val="accent1"/>
+              </a:fillRef>
+              <a:effectRef idx="0">
+                <a:schemeClr val="accent1"/>
+              </a:effectRef>
+              <a:fontRef idx="minor">
+                <a:schemeClr val="lt1"/>
+              </a:fontRef>
+            </p:style>
+            <p:txBody>
+              <a:bodyPr rtlCol="0" anchor="ctr"/>
+              <a:lstStyle/>
+              <a:p>
+                <a:pPr algn="ctr"/>
+                <a:endParaRPr lang="fr-FR"/>
+              </a:p>
+            </p:txBody>
+          </p:sp>
+          <p:sp>
+            <p:nvSpPr>
+              <p:cNvPr id="28" name="Ellipse 27">
+                <a:extLst>
+                  <a:ext uri="{FF2B5EF4-FFF2-40B4-BE49-F238E27FC236}">
+                    <a16:creationId xmlns:a16="http://schemas.microsoft.com/office/drawing/2014/main" id="{9B74DD1E-6E0D-67E9-AEB3-8A93DB983BCB}"/>
+                  </a:ext>
+                </a:extLst>
+              </p:cNvPr>
+              <p:cNvSpPr/>
+              <p:nvPr/>
+            </p:nvSpPr>
+            <p:spPr>
+              <a:xfrm>
+                <a:off x="945610" y="1941528"/>
+                <a:ext cx="72000" cy="72000"/>
+              </a:xfrm>
+              <a:prstGeom prst="ellipse">
+                <a:avLst/>
+              </a:prstGeom>
+              <a:solidFill>
+                <a:schemeClr val="tx1"/>
+              </a:solidFill>
+              <a:ln w="19050">
+                <a:solidFill>
+                  <a:schemeClr val="tx1"/>
+                </a:solidFill>
+              </a:ln>
+            </p:spPr>
+            <p:style>
+              <a:lnRef idx="2">
+                <a:schemeClr val="accent1">
+                  <a:shade val="50000"/>
+                </a:schemeClr>
+              </a:lnRef>
+              <a:fillRef idx="1">
+                <a:schemeClr val="accent1"/>
+              </a:fillRef>
+              <a:effectRef idx="0">
+                <a:schemeClr val="accent1"/>
+              </a:effectRef>
+              <a:fontRef idx="minor">
+                <a:schemeClr val="lt1"/>
+              </a:fontRef>
+            </p:style>
+            <p:txBody>
+              <a:bodyPr rtlCol="0" anchor="ctr"/>
+              <a:lstStyle/>
+              <a:p>
+                <a:pPr algn="ctr"/>
+                <a:endParaRPr lang="fr-FR"/>
+              </a:p>
+            </p:txBody>
+          </p:sp>
+          <p:sp>
+            <p:nvSpPr>
+              <p:cNvPr id="29" name="Arc 28">
+                <a:extLst>
+                  <a:ext uri="{FF2B5EF4-FFF2-40B4-BE49-F238E27FC236}">
+                    <a16:creationId xmlns:a16="http://schemas.microsoft.com/office/drawing/2014/main" id="{B2E2BD8A-77DB-0602-8743-7F78DB832B56}"/>
+                  </a:ext>
+                </a:extLst>
+              </p:cNvPr>
+              <p:cNvSpPr/>
+              <p:nvPr/>
+            </p:nvSpPr>
+            <p:spPr>
+              <a:xfrm>
+                <a:off x="-180530" y="836712"/>
+                <a:ext cx="2304258" cy="2304258"/>
+              </a:xfrm>
+              <a:prstGeom prst="arc">
+                <a:avLst>
+                  <a:gd name="adj1" fmla="val 20716967"/>
+                  <a:gd name="adj2" fmla="val 0"/>
+                </a:avLst>
+              </a:prstGeom>
+              <a:ln>
+                <a:solidFill>
+                  <a:srgbClr val="7030A0"/>
+                </a:solidFill>
+                <a:headEnd type="stealth" w="med" len="lg"/>
+              </a:ln>
+            </p:spPr>
+            <p:style>
+              <a:lnRef idx="1">
+                <a:schemeClr val="accent1"/>
+              </a:lnRef>
+              <a:fillRef idx="0">
+                <a:schemeClr val="accent1"/>
+              </a:fillRef>
+              <a:effectRef idx="0">
+                <a:schemeClr val="accent1"/>
+              </a:effectRef>
+              <a:fontRef idx="minor">
+                <a:schemeClr val="tx1"/>
+              </a:fontRef>
+            </p:style>
+            <p:txBody>
+              <a:bodyPr rtlCol="0" anchor="ctr"/>
+              <a:lstStyle/>
+              <a:p>
+                <a:pPr algn="ctr"/>
+                <a:endParaRPr lang="fr-FR"/>
+              </a:p>
+            </p:txBody>
+          </p:sp>
+          <mc:AlternateContent xmlns:mc="http://schemas.openxmlformats.org/markup-compatibility/2006" xmlns:a14="http://schemas.microsoft.com/office/drawing/2010/main">
+            <mc:Choice Requires="a14">
+              <p:sp>
+                <p:nvSpPr>
+                  <p:cNvPr id="30" name="ZoneTexte 29">
+                    <a:extLst>
+                      <a:ext uri="{FF2B5EF4-FFF2-40B4-BE49-F238E27FC236}">
+                        <a16:creationId xmlns:a16="http://schemas.microsoft.com/office/drawing/2014/main" id="{B0F909F0-4D19-2493-A8BA-8F76EEFDD636}"/>
+                      </a:ext>
+                    </a:extLst>
+                  </p:cNvPr>
+                  <p:cNvSpPr txBox="1"/>
+                  <p:nvPr/>
+                </p:nvSpPr>
+                <p:spPr>
+                  <a:xfrm>
+                    <a:off x="2425954" y="1865728"/>
+                    <a:ext cx="161711" cy="246221"/>
+                  </a:xfrm>
+                  <a:prstGeom prst="rect">
+                    <a:avLst/>
+                  </a:prstGeom>
+                  <a:noFill/>
+                </p:spPr>
+                <p:txBody>
+                  <a:bodyPr wrap="none" lIns="0" tIns="0" rIns="0" bIns="0" rtlCol="0">
+                    <a:spAutoFit/>
+                  </a:bodyPr>
+                  <a:lstStyle/>
+                  <a:p>
+                    <a:pPr/>
+                    <a14:m>
+                      <m:oMathPara xmlns:m="http://schemas.openxmlformats.org/officeDocument/2006/math">
+                        <m:oMathParaPr>
+                          <m:jc m:val="centerGroup"/>
+                        </m:oMathParaPr>
+                        <m:oMath xmlns:m="http://schemas.openxmlformats.org/officeDocument/2006/math">
+                          <m:acc>
+                            <m:accPr>
+                              <m:chr m:val="⃗"/>
+                              <m:ctrlPr>
+                                <a:rPr lang="fr-FR" sz="1600" i="1" smtClean="0">
+                                  <a:latin typeface="Cambria Math" panose="02040503050406030204" pitchFamily="18" charset="0"/>
+                                </a:rPr>
+                              </m:ctrlPr>
+                            </m:accPr>
+                            <m:e>
+                              <m:r>
+                                <a:rPr lang="fr-FR" sz="1600" b="0" i="1" smtClean="0">
+                                  <a:latin typeface="Cambria Math" panose="02040503050406030204" pitchFamily="18" charset="0"/>
+                                </a:rPr>
+                                <m:t>𝑥</m:t>
+                              </m:r>
+                            </m:e>
+                          </m:acc>
+                        </m:oMath>
+                      </m:oMathPara>
+                    </a14:m>
+                    <a:endParaRPr lang="fr-FR" sz="1600" dirty="0"/>
+                  </a:p>
+                </p:txBody>
+              </p:sp>
+            </mc:Choice>
+            <mc:Fallback xmlns="">
+              <p:sp>
+                <p:nvSpPr>
+                  <p:cNvPr id="10" name="ZoneTexte 9">
+                    <a:extLst>
+                      <a:ext uri="{FF2B5EF4-FFF2-40B4-BE49-F238E27FC236}">
+                        <a16:creationId xmlns:a16="http://schemas.microsoft.com/office/drawing/2014/main" id="{59F34FB8-E791-ABC3-190C-A69F2B4C1D29}"/>
+                      </a:ext>
+                    </a:extLst>
+                  </p:cNvPr>
+                  <p:cNvSpPr txBox="1">
+                    <a:spLocks noRot="1" noChangeAspect="1" noMove="1" noResize="1" noEditPoints="1" noAdjustHandles="1" noChangeArrowheads="1" noChangeShapeType="1" noTextEdit="1"/>
+                  </p:cNvSpPr>
+                  <p:nvPr/>
+                </p:nvSpPr>
+                <p:spPr>
+                  <a:xfrm>
+                    <a:off x="2425954" y="1865728"/>
+                    <a:ext cx="161711" cy="246221"/>
+                  </a:xfrm>
+                  <a:prstGeom prst="rect">
+                    <a:avLst/>
+                  </a:prstGeom>
+                  <a:blipFill>
+                    <a:blip r:embed="rId3"/>
+                    <a:stretch>
+                      <a:fillRect l="-26923" t="-36585" r="-100000" b="-2439"/>
+                    </a:stretch>
+                  </a:blipFill>
+                </p:spPr>
+                <p:txBody>
+                  <a:bodyPr/>
+                  <a:lstStyle/>
+                  <a:p>
+                    <a:r>
+                      <a:rPr lang="fr-FR">
+                        <a:noFill/>
+                      </a:rPr>
+                      <a:t> </a:t>
+                    </a:r>
+                  </a:p>
+                </p:txBody>
+              </p:sp>
+            </mc:Fallback>
+          </mc:AlternateContent>
+          <mc:AlternateContent xmlns:mc="http://schemas.openxmlformats.org/markup-compatibility/2006" xmlns:a14="http://schemas.microsoft.com/office/drawing/2010/main">
+            <mc:Choice Requires="a14">
+              <p:sp>
+                <p:nvSpPr>
+                  <p:cNvPr id="31" name="ZoneTexte 30">
+                    <a:extLst>
+                      <a:ext uri="{FF2B5EF4-FFF2-40B4-BE49-F238E27FC236}">
+                        <a16:creationId xmlns:a16="http://schemas.microsoft.com/office/drawing/2014/main" id="{E1ECE65E-2A52-6BDD-5C2D-6114628B035A}"/>
+                      </a:ext>
+                    </a:extLst>
+                  </p:cNvPr>
+                  <p:cNvSpPr txBox="1"/>
+                  <p:nvPr/>
+                </p:nvSpPr>
+                <p:spPr>
+                  <a:xfrm>
+                    <a:off x="890538" y="281011"/>
+                    <a:ext cx="165430" cy="246221"/>
+                  </a:xfrm>
+                  <a:prstGeom prst="rect">
+                    <a:avLst/>
+                  </a:prstGeom>
+                  <a:noFill/>
+                </p:spPr>
+                <p:txBody>
+                  <a:bodyPr wrap="none" lIns="0" tIns="0" rIns="0" bIns="0" rtlCol="0">
+                    <a:spAutoFit/>
+                  </a:bodyPr>
+                  <a:lstStyle/>
+                  <a:p>
+                    <a:pPr/>
+                    <a14:m>
+                      <m:oMathPara xmlns:m="http://schemas.openxmlformats.org/officeDocument/2006/math">
+                        <m:oMathParaPr>
+                          <m:jc m:val="centerGroup"/>
+                        </m:oMathParaPr>
+                        <m:oMath xmlns:m="http://schemas.openxmlformats.org/officeDocument/2006/math">
+                          <m:acc>
+                            <m:accPr>
+                              <m:chr m:val="⃗"/>
+                              <m:ctrlPr>
+                                <a:rPr lang="fr-FR" sz="1600" i="1" smtClean="0">
+                                  <a:latin typeface="Cambria Math" panose="02040503050406030204" pitchFamily="18" charset="0"/>
+                                </a:rPr>
+                              </m:ctrlPr>
+                            </m:accPr>
+                            <m:e>
+                              <m:r>
+                                <a:rPr lang="fr-FR" sz="1600" b="0" i="1" smtClean="0">
+                                  <a:latin typeface="Cambria Math" panose="02040503050406030204" pitchFamily="18" charset="0"/>
+                                </a:rPr>
+                                <m:t>𝑦</m:t>
+                              </m:r>
+                            </m:e>
+                          </m:acc>
+                        </m:oMath>
+                      </m:oMathPara>
+                    </a14:m>
+                    <a:endParaRPr lang="fr-FR" sz="1600" dirty="0"/>
+                  </a:p>
+                </p:txBody>
+              </p:sp>
+            </mc:Choice>
+            <mc:Fallback xmlns="">
+              <p:sp>
+                <p:nvSpPr>
+                  <p:cNvPr id="11" name="ZoneTexte 10">
+                    <a:extLst>
+                      <a:ext uri="{FF2B5EF4-FFF2-40B4-BE49-F238E27FC236}">
+                        <a16:creationId xmlns:a16="http://schemas.microsoft.com/office/drawing/2014/main" id="{8BBE66A5-E35C-1B4B-D795-F0617DF560C6}"/>
+                      </a:ext>
+                    </a:extLst>
+                  </p:cNvPr>
+                  <p:cNvSpPr txBox="1">
+                    <a:spLocks noRot="1" noChangeAspect="1" noMove="1" noResize="1" noEditPoints="1" noAdjustHandles="1" noChangeArrowheads="1" noChangeShapeType="1" noTextEdit="1"/>
+                  </p:cNvSpPr>
+                  <p:nvPr/>
+                </p:nvSpPr>
+                <p:spPr>
+                  <a:xfrm>
+                    <a:off x="890538" y="281011"/>
+                    <a:ext cx="165430" cy="246221"/>
+                  </a:xfrm>
+                  <a:prstGeom prst="rect">
+                    <a:avLst/>
+                  </a:prstGeom>
+                  <a:blipFill>
+                    <a:blip r:embed="rId4"/>
+                    <a:stretch>
+                      <a:fillRect l="-29630" t="-36585" r="-96296" b="-21951"/>
+                    </a:stretch>
+                  </a:blipFill>
+                </p:spPr>
+                <p:txBody>
+                  <a:bodyPr/>
+                  <a:lstStyle/>
+                  <a:p>
+                    <a:r>
+                      <a:rPr lang="fr-FR">
+                        <a:noFill/>
+                      </a:rPr>
+                      <a:t> </a:t>
+                    </a:r>
+                  </a:p>
+                </p:txBody>
+              </p:sp>
+            </mc:Fallback>
+          </mc:AlternateContent>
+          <mc:AlternateContent xmlns:mc="http://schemas.openxmlformats.org/markup-compatibility/2006" xmlns:a14="http://schemas.microsoft.com/office/drawing/2010/main">
+            <mc:Choice Requires="a14">
+              <p:sp>
+                <p:nvSpPr>
+                  <p:cNvPr id="32" name="ZoneTexte 31">
+                    <a:extLst>
+                      <a:ext uri="{FF2B5EF4-FFF2-40B4-BE49-F238E27FC236}">
+                        <a16:creationId xmlns:a16="http://schemas.microsoft.com/office/drawing/2014/main" id="{261B7479-FE17-21A0-96CF-802C6B325AC9}"/>
+                      </a:ext>
+                    </a:extLst>
+                  </p:cNvPr>
+                  <p:cNvSpPr txBox="1"/>
+                  <p:nvPr/>
+                </p:nvSpPr>
+                <p:spPr>
+                  <a:xfrm>
+                    <a:off x="890538" y="2131415"/>
+                    <a:ext cx="149400" cy="246221"/>
+                  </a:xfrm>
+                  <a:prstGeom prst="rect">
+                    <a:avLst/>
+                  </a:prstGeom>
+                  <a:noFill/>
+                </p:spPr>
+                <p:txBody>
+                  <a:bodyPr wrap="none" lIns="0" tIns="0" rIns="0" bIns="0" rtlCol="0">
+                    <a:spAutoFit/>
+                  </a:bodyPr>
+                  <a:lstStyle/>
+                  <a:p>
+                    <a:pPr/>
+                    <a14:m>
+                      <m:oMathPara xmlns:m="http://schemas.openxmlformats.org/officeDocument/2006/math">
+                        <m:oMathParaPr>
+                          <m:jc m:val="centerGroup"/>
+                        </m:oMathParaPr>
+                        <m:oMath xmlns:m="http://schemas.openxmlformats.org/officeDocument/2006/math">
+                          <m:acc>
+                            <m:accPr>
+                              <m:chr m:val="⃗"/>
+                              <m:ctrlPr>
+                                <a:rPr lang="fr-FR" sz="1600" i="1" smtClean="0">
+                                  <a:latin typeface="Cambria Math" panose="02040503050406030204" pitchFamily="18" charset="0"/>
+                                </a:rPr>
+                              </m:ctrlPr>
+                            </m:accPr>
+                            <m:e>
+                              <m:r>
+                                <a:rPr lang="fr-FR" sz="1600" b="0" i="1" smtClean="0">
+                                  <a:latin typeface="Cambria Math" panose="02040503050406030204" pitchFamily="18" charset="0"/>
+                                </a:rPr>
+                                <m:t>𝑧</m:t>
+                              </m:r>
+                            </m:e>
+                          </m:acc>
+                        </m:oMath>
+                      </m:oMathPara>
+                    </a14:m>
+                    <a:endParaRPr lang="fr-FR" sz="1600" dirty="0"/>
+                  </a:p>
+                </p:txBody>
+              </p:sp>
+            </mc:Choice>
+            <mc:Fallback xmlns="">
+              <p:sp>
+                <p:nvSpPr>
+                  <p:cNvPr id="12" name="ZoneTexte 11">
+                    <a:extLst>
+                      <a:ext uri="{FF2B5EF4-FFF2-40B4-BE49-F238E27FC236}">
+                        <a16:creationId xmlns:a16="http://schemas.microsoft.com/office/drawing/2014/main" id="{B38ADBDA-555D-D5CA-DFB6-72277CFAAE9E}"/>
+                      </a:ext>
+                    </a:extLst>
+                  </p:cNvPr>
+                  <p:cNvSpPr txBox="1">
+                    <a:spLocks noRot="1" noChangeAspect="1" noMove="1" noResize="1" noEditPoints="1" noAdjustHandles="1" noChangeArrowheads="1" noChangeShapeType="1" noTextEdit="1"/>
+                  </p:cNvSpPr>
+                  <p:nvPr/>
+                </p:nvSpPr>
+                <p:spPr>
+                  <a:xfrm>
+                    <a:off x="890538" y="2131415"/>
+                    <a:ext cx="149400" cy="246221"/>
+                  </a:xfrm>
+                  <a:prstGeom prst="rect">
+                    <a:avLst/>
+                  </a:prstGeom>
+                  <a:blipFill>
+                    <a:blip r:embed="rId5"/>
+                    <a:stretch>
+                      <a:fillRect l="-29167" t="-40000" r="-108333" b="-2500"/>
+                    </a:stretch>
+                  </a:blipFill>
+                </p:spPr>
+                <p:txBody>
+                  <a:bodyPr/>
+                  <a:lstStyle/>
+                  <a:p>
+                    <a:r>
+                      <a:rPr lang="fr-FR">
+                        <a:noFill/>
+                      </a:rPr>
+                      <a:t> </a:t>
+                    </a:r>
+                  </a:p>
+                </p:txBody>
+              </p:sp>
+            </mc:Fallback>
+          </mc:AlternateContent>
+          <mc:AlternateContent xmlns:mc="http://schemas.openxmlformats.org/markup-compatibility/2006" xmlns:a14="http://schemas.microsoft.com/office/drawing/2010/main">
+            <mc:Choice Requires="a14">
+              <p:sp>
+                <p:nvSpPr>
+                  <p:cNvPr id="33" name="ZoneTexte 32">
+                    <a:extLst>
+                      <a:ext uri="{FF2B5EF4-FFF2-40B4-BE49-F238E27FC236}">
+                        <a16:creationId xmlns:a16="http://schemas.microsoft.com/office/drawing/2014/main" id="{6942BF46-193C-7EB6-FD2A-53068F67884A}"/>
+                      </a:ext>
+                    </a:extLst>
+                  </p:cNvPr>
+                  <p:cNvSpPr txBox="1"/>
+                  <p:nvPr/>
+                </p:nvSpPr>
+                <p:spPr>
+                  <a:xfrm>
+                    <a:off x="2134392" y="1740548"/>
+                    <a:ext cx="313739" cy="184666"/>
+                  </a:xfrm>
+                  <a:prstGeom prst="rect">
+                    <a:avLst/>
+                  </a:prstGeom>
+                  <a:noFill/>
+                </p:spPr>
+                <p:txBody>
+                  <a:bodyPr wrap="none" lIns="0" tIns="0" rIns="0" bIns="0" rtlCol="0">
+                    <a:spAutoFit/>
+                  </a:bodyPr>
+                  <a:lstStyle/>
+                  <a:p>
+                    <a:pPr/>
+                    <a14:m>
+                      <m:oMathPara xmlns:m="http://schemas.openxmlformats.org/officeDocument/2006/math">
+                        <m:oMathParaPr>
+                          <m:jc m:val="centerGroup"/>
+                        </m:oMathParaPr>
+                        <m:oMath xmlns:m="http://schemas.openxmlformats.org/officeDocument/2006/math">
+                          <m:sSub>
+                            <m:sSubPr>
+                              <m:ctrlPr>
+                                <a:rPr lang="fr-FR" sz="1200" b="0" i="1" smtClean="0">
+                                  <a:latin typeface="Cambria Math" panose="02040503050406030204" pitchFamily="18" charset="0"/>
+                                </a:rPr>
+                              </m:ctrlPr>
+                            </m:sSubPr>
+                            <m:e>
+                              <m:r>
+                                <a:rPr lang="fr-FR" sz="1200" b="0" i="1" smtClean="0">
+                                  <a:latin typeface="Cambria Math" panose="02040503050406030204" pitchFamily="18" charset="0"/>
+                                </a:rPr>
+                                <m:t>𝜑</m:t>
+                              </m:r>
+                            </m:e>
+                            <m:sub>
+                              <m:r>
+                                <a:rPr lang="fr-FR" sz="1200" b="0" i="1" smtClean="0">
+                                  <a:latin typeface="Cambria Math" panose="02040503050406030204" pitchFamily="18" charset="0"/>
+                                </a:rPr>
+                                <m:t>𝐻𝐷</m:t>
+                              </m:r>
+                            </m:sub>
+                          </m:sSub>
+                        </m:oMath>
+                      </m:oMathPara>
+                    </a14:m>
+                    <a:endParaRPr lang="fr-FR" sz="1200" dirty="0"/>
+                  </a:p>
+                </p:txBody>
+              </p:sp>
+            </mc:Choice>
+            <mc:Fallback xmlns="">
+              <p:sp>
+                <p:nvSpPr>
+                  <p:cNvPr id="13" name="ZoneTexte 12">
+                    <a:extLst>
+                      <a:ext uri="{FF2B5EF4-FFF2-40B4-BE49-F238E27FC236}">
+                        <a16:creationId xmlns:a16="http://schemas.microsoft.com/office/drawing/2014/main" id="{17BA7FDD-5ECF-0266-DADF-E55684F54172}"/>
+                      </a:ext>
+                    </a:extLst>
+                  </p:cNvPr>
+                  <p:cNvSpPr txBox="1">
+                    <a:spLocks noRot="1" noChangeAspect="1" noMove="1" noResize="1" noEditPoints="1" noAdjustHandles="1" noChangeArrowheads="1" noChangeShapeType="1" noTextEdit="1"/>
+                  </p:cNvSpPr>
+                  <p:nvPr/>
+                </p:nvSpPr>
+                <p:spPr>
+                  <a:xfrm>
+                    <a:off x="2134392" y="1740548"/>
+                    <a:ext cx="313739" cy="184666"/>
+                  </a:xfrm>
+                  <a:prstGeom prst="rect">
+                    <a:avLst/>
+                  </a:prstGeom>
+                  <a:blipFill>
+                    <a:blip r:embed="rId6"/>
+                    <a:stretch>
+                      <a:fillRect l="-11765" r="-3922" b="-23333"/>
+                    </a:stretch>
+                  </a:blipFill>
+                </p:spPr>
+                <p:txBody>
+                  <a:bodyPr/>
+                  <a:lstStyle/>
+                  <a:p>
+                    <a:r>
+                      <a:rPr lang="fr-FR">
+                        <a:noFill/>
+                      </a:rPr>
+                      <a:t> </a:t>
+                    </a:r>
+                  </a:p>
+                </p:txBody>
+              </p:sp>
+            </mc:Fallback>
+          </mc:AlternateContent>
+          <mc:AlternateContent xmlns:mc="http://schemas.openxmlformats.org/markup-compatibility/2006" xmlns:a14="http://schemas.microsoft.com/office/drawing/2010/main">
+            <mc:Choice Requires="a14">
+              <p:sp>
+                <p:nvSpPr>
+                  <p:cNvPr id="34" name="ZoneTexte 33">
+                    <a:extLst>
+                      <a:ext uri="{FF2B5EF4-FFF2-40B4-BE49-F238E27FC236}">
+                        <a16:creationId xmlns:a16="http://schemas.microsoft.com/office/drawing/2014/main" id="{DBD129AB-B024-96E9-DADD-B5ED526EFA5D}"/>
+                      </a:ext>
+                    </a:extLst>
+                  </p:cNvPr>
+                  <p:cNvSpPr txBox="1"/>
+                  <p:nvPr/>
+                </p:nvSpPr>
+                <p:spPr>
+                  <a:xfrm>
+                    <a:off x="2417192" y="1458251"/>
+                    <a:ext cx="395301" cy="246221"/>
+                  </a:xfrm>
+                  <a:prstGeom prst="rect">
+                    <a:avLst/>
+                  </a:prstGeom>
+                  <a:noFill/>
+                </p:spPr>
+                <p:txBody>
+                  <a:bodyPr wrap="none" lIns="0" tIns="0" rIns="0" bIns="0" rtlCol="0">
+                    <a:spAutoFit/>
+                  </a:bodyPr>
+                  <a:lstStyle/>
+                  <a:p>
+                    <a:pPr/>
+                    <a14:m>
+                      <m:oMathPara xmlns:m="http://schemas.openxmlformats.org/officeDocument/2006/math">
+                        <m:oMathParaPr>
+                          <m:jc m:val="centerGroup"/>
+                        </m:oMathParaPr>
+                        <m:oMath xmlns:m="http://schemas.openxmlformats.org/officeDocument/2006/math">
+                          <m:acc>
+                            <m:accPr>
+                              <m:chr m:val="⃗"/>
+                              <m:ctrlPr>
+                                <a:rPr lang="fr-FR" sz="1600" i="1" smtClean="0">
+                                  <a:latin typeface="Cambria Math" panose="02040503050406030204" pitchFamily="18" charset="0"/>
+                                </a:rPr>
+                              </m:ctrlPr>
+                            </m:accPr>
+                            <m:e>
+                              <m:sSub>
+                                <m:sSubPr>
+                                  <m:ctrlPr>
+                                    <a:rPr lang="fr-FR" sz="1600" i="1">
+                                      <a:latin typeface="Cambria Math" panose="02040503050406030204" pitchFamily="18" charset="0"/>
+                                    </a:rPr>
+                                  </m:ctrlPr>
+                                </m:sSubPr>
+                                <m:e>
+                                  <m:r>
+                                    <a:rPr lang="fr-FR" sz="1600" b="0" i="1" smtClean="0">
+                                      <a:latin typeface="Cambria Math" panose="02040503050406030204" pitchFamily="18" charset="0"/>
+                                    </a:rPr>
+                                    <m:t>𝑢</m:t>
+                                  </m:r>
+                                </m:e>
+                                <m:sub>
+                                  <m:r>
+                                    <a:rPr lang="fr-FR" sz="1600" b="0" i="1" smtClean="0">
+                                      <a:latin typeface="Cambria Math" panose="02040503050406030204" pitchFamily="18" charset="0"/>
+                                    </a:rPr>
+                                    <m:t>𝐻𝐷</m:t>
+                                  </m:r>
+                                </m:sub>
+                              </m:sSub>
+                            </m:e>
+                          </m:acc>
+                        </m:oMath>
+                      </m:oMathPara>
+                    </a14:m>
+                    <a:endParaRPr lang="fr-FR" sz="1600" dirty="0"/>
+                  </a:p>
+                </p:txBody>
+              </p:sp>
+            </mc:Choice>
+            <mc:Fallback xmlns="">
+              <p:sp>
+                <p:nvSpPr>
+                  <p:cNvPr id="14" name="ZoneTexte 13">
+                    <a:extLst>
+                      <a:ext uri="{FF2B5EF4-FFF2-40B4-BE49-F238E27FC236}">
+                        <a16:creationId xmlns:a16="http://schemas.microsoft.com/office/drawing/2014/main" id="{4CC039D4-0A44-DC7E-5CD6-CDDDED0DCCA4}"/>
+                      </a:ext>
+                    </a:extLst>
+                  </p:cNvPr>
+                  <p:cNvSpPr txBox="1">
+                    <a:spLocks noRot="1" noChangeAspect="1" noMove="1" noResize="1" noEditPoints="1" noAdjustHandles="1" noChangeArrowheads="1" noChangeShapeType="1" noTextEdit="1"/>
+                  </p:cNvSpPr>
+                  <p:nvPr/>
+                </p:nvSpPr>
+                <p:spPr>
+                  <a:xfrm>
+                    <a:off x="2417192" y="1458251"/>
+                    <a:ext cx="395301" cy="246221"/>
+                  </a:xfrm>
+                  <a:prstGeom prst="rect">
+                    <a:avLst/>
+                  </a:prstGeom>
+                  <a:blipFill>
+                    <a:blip r:embed="rId7"/>
+                    <a:stretch>
+                      <a:fillRect l="-6154" r="-1538" b="-15000"/>
+                    </a:stretch>
+                  </a:blipFill>
+                </p:spPr>
+                <p:txBody>
+                  <a:bodyPr/>
+                  <a:lstStyle/>
+                  <a:p>
+                    <a:r>
+                      <a:rPr lang="fr-FR">
+                        <a:noFill/>
+                      </a:rPr>
+                      <a:t> </a:t>
+                    </a:r>
+                  </a:p>
+                </p:txBody>
+              </p:sp>
+            </mc:Fallback>
+          </mc:AlternateContent>
+          <mc:AlternateContent xmlns:mc="http://schemas.openxmlformats.org/markup-compatibility/2006" xmlns:a14="http://schemas.microsoft.com/office/drawing/2010/main">
+            <mc:Choice Requires="a14">
+              <p:sp>
+                <p:nvSpPr>
+                  <p:cNvPr id="35" name="ZoneTexte 34">
+                    <a:extLst>
+                      <a:ext uri="{FF2B5EF4-FFF2-40B4-BE49-F238E27FC236}">
+                        <a16:creationId xmlns:a16="http://schemas.microsoft.com/office/drawing/2014/main" id="{BDCF70A6-1F3B-3307-C72C-3E143AC35384}"/>
+                      </a:ext>
+                    </a:extLst>
+                  </p:cNvPr>
+                  <p:cNvSpPr txBox="1"/>
+                  <p:nvPr/>
+                </p:nvSpPr>
+                <p:spPr>
+                  <a:xfrm>
+                    <a:off x="494181" y="281011"/>
+                    <a:ext cx="388504" cy="246221"/>
+                  </a:xfrm>
+                  <a:prstGeom prst="rect">
+                    <a:avLst/>
+                  </a:prstGeom>
+                  <a:noFill/>
+                </p:spPr>
+                <p:txBody>
+                  <a:bodyPr wrap="none" lIns="0" tIns="0" rIns="0" bIns="0" rtlCol="0">
+                    <a:spAutoFit/>
+                  </a:bodyPr>
+                  <a:lstStyle/>
+                  <a:p>
+                    <a:pPr/>
+                    <a14:m>
+                      <m:oMathPara xmlns:m="http://schemas.openxmlformats.org/officeDocument/2006/math">
+                        <m:oMathParaPr>
+                          <m:jc m:val="centerGroup"/>
+                        </m:oMathParaPr>
+                        <m:oMath xmlns:m="http://schemas.openxmlformats.org/officeDocument/2006/math">
+                          <m:acc>
+                            <m:accPr>
+                              <m:chr m:val="⃗"/>
+                              <m:ctrlPr>
+                                <a:rPr lang="fr-FR" sz="1600" i="1" smtClean="0">
+                                  <a:latin typeface="Cambria Math" panose="02040503050406030204" pitchFamily="18" charset="0"/>
+                                </a:rPr>
+                              </m:ctrlPr>
+                            </m:accPr>
+                            <m:e>
+                              <m:sSub>
+                                <m:sSubPr>
+                                  <m:ctrlPr>
+                                    <a:rPr lang="fr-FR" sz="1600" b="0" i="1" smtClean="0">
+                                      <a:latin typeface="Cambria Math" panose="02040503050406030204" pitchFamily="18" charset="0"/>
+                                    </a:rPr>
+                                  </m:ctrlPr>
+                                </m:sSubPr>
+                                <m:e>
+                                  <m:r>
+                                    <a:rPr lang="fr-FR" sz="1600" i="1" smtClean="0">
+                                      <a:latin typeface="Cambria Math" panose="02040503050406030204" pitchFamily="18" charset="0"/>
+                                    </a:rPr>
+                                    <m:t>𝑣</m:t>
+                                  </m:r>
+                                </m:e>
+                                <m:sub>
+                                  <m:r>
+                                    <a:rPr lang="fr-FR" sz="1600" b="0" i="1" smtClean="0">
+                                      <a:latin typeface="Cambria Math" panose="02040503050406030204" pitchFamily="18" charset="0"/>
+                                    </a:rPr>
+                                    <m:t>𝐻𝐷</m:t>
+                                  </m:r>
+                                </m:sub>
+                              </m:sSub>
+                            </m:e>
+                          </m:acc>
+                        </m:oMath>
+                      </m:oMathPara>
+                    </a14:m>
+                    <a:endParaRPr lang="fr-FR" sz="1600" dirty="0"/>
+                  </a:p>
+                </p:txBody>
+              </p:sp>
+            </mc:Choice>
+            <mc:Fallback xmlns="">
+              <p:sp>
+                <p:nvSpPr>
+                  <p:cNvPr id="15" name="ZoneTexte 14">
+                    <a:extLst>
+                      <a:ext uri="{FF2B5EF4-FFF2-40B4-BE49-F238E27FC236}">
+                        <a16:creationId xmlns:a16="http://schemas.microsoft.com/office/drawing/2014/main" id="{969FE864-E539-0495-C0F1-D1BA56D61BE8}"/>
+                      </a:ext>
+                    </a:extLst>
+                  </p:cNvPr>
+                  <p:cNvSpPr txBox="1">
+                    <a:spLocks noRot="1" noChangeAspect="1" noMove="1" noResize="1" noEditPoints="1" noAdjustHandles="1" noChangeArrowheads="1" noChangeShapeType="1" noTextEdit="1"/>
+                  </p:cNvSpPr>
+                  <p:nvPr/>
+                </p:nvSpPr>
+                <p:spPr>
+                  <a:xfrm>
+                    <a:off x="494181" y="281011"/>
+                    <a:ext cx="388504" cy="246221"/>
+                  </a:xfrm>
+                  <a:prstGeom prst="rect">
+                    <a:avLst/>
+                  </a:prstGeom>
+                  <a:blipFill>
+                    <a:blip r:embed="rId8"/>
+                    <a:stretch>
+                      <a:fillRect l="-7937" r="-3175" b="-12195"/>
+                    </a:stretch>
+                  </a:blipFill>
+                </p:spPr>
+                <p:txBody>
+                  <a:bodyPr/>
+                  <a:lstStyle/>
+                  <a:p>
+                    <a:r>
+                      <a:rPr lang="fr-FR">
+                        <a:noFill/>
+                      </a:rPr>
+                      <a:t> </a:t>
+                    </a:r>
+                  </a:p>
+                </p:txBody>
+              </p:sp>
+            </mc:Fallback>
+          </mc:AlternateContent>
+          <p:sp>
+            <p:nvSpPr>
+              <p:cNvPr id="36" name="ZoneTexte 35">
+                <a:extLst>
+                  <a:ext uri="{FF2B5EF4-FFF2-40B4-BE49-F238E27FC236}">
+                    <a16:creationId xmlns:a16="http://schemas.microsoft.com/office/drawing/2014/main" id="{1E9633A1-93C3-C0E1-D9D8-687CB78AFE51}"/>
+                  </a:ext>
+                </a:extLst>
+              </p:cNvPr>
+              <p:cNvSpPr txBox="1"/>
+              <p:nvPr/>
+            </p:nvSpPr>
+            <p:spPr>
+              <a:xfrm>
+                <a:off x="1870700" y="1453663"/>
+                <a:ext cx="65" cy="184666"/>
+              </a:xfrm>
+              <a:prstGeom prst="rect">
+                <a:avLst/>
+              </a:prstGeom>
+              <a:noFill/>
+            </p:spPr>
+            <p:txBody>
+              <a:bodyPr wrap="none" lIns="0" tIns="0" rIns="0" bIns="0" rtlCol="0">
+                <a:spAutoFit/>
+              </a:bodyPr>
+              <a:lstStyle/>
+              <a:p>
+                <a:endParaRPr lang="fr-FR" sz="1200" dirty="0"/>
+              </a:p>
+            </p:txBody>
+          </p:sp>
+        </p:grpSp>
+        <p:sp>
+          <p:nvSpPr>
+            <p:cNvPr id="20" name="ZoneTexte 19">
+              <a:extLst>
+                <a:ext uri="{FF2B5EF4-FFF2-40B4-BE49-F238E27FC236}">
+                  <a16:creationId xmlns:a16="http://schemas.microsoft.com/office/drawing/2014/main" id="{AAF4F17D-6928-11BC-DFC1-74F6670AE954}"/>
+                </a:ext>
+              </a:extLst>
+            </p:cNvPr>
+            <p:cNvSpPr txBox="1"/>
+            <p:nvPr/>
+          </p:nvSpPr>
+          <p:spPr>
+            <a:xfrm>
+              <a:off x="2676671" y="2894260"/>
+              <a:ext cx="65" cy="184666"/>
+            </a:xfrm>
+            <a:prstGeom prst="rect">
+              <a:avLst/>
+            </a:prstGeom>
+            <a:noFill/>
+          </p:spPr>
+          <p:txBody>
+            <a:bodyPr wrap="none" lIns="0" tIns="0" rIns="0" bIns="0" rtlCol="0">
+              <a:spAutoFit/>
+            </a:bodyPr>
+            <a:lstStyle/>
+            <a:p>
+              <a:endParaRPr lang="fr-FR" sz="1200" dirty="0"/>
+            </a:p>
+          </p:txBody>
+        </p:sp>
+      </p:grpSp>
+      <mc:AlternateContent xmlns:mc="http://schemas.openxmlformats.org/markup-compatibility/2006">
+        <mc:Choice xmlns:a14="http://schemas.microsoft.com/office/drawing/2010/main" Requires="a14">
+          <p:sp>
+            <p:nvSpPr>
+              <p:cNvPr id="41" name="Espace réservé du contenu 2">
+                <a:extLst>
+                  <a:ext uri="{FF2B5EF4-FFF2-40B4-BE49-F238E27FC236}">
+                    <a16:creationId xmlns:a16="http://schemas.microsoft.com/office/drawing/2014/main" id="{23C05DF7-71E0-9025-FB8A-4A6909978D01}"/>
+                  </a:ext>
+                </a:extLst>
+              </p:cNvPr>
+              <p:cNvSpPr txBox="1">
+                <a:spLocks/>
+              </p:cNvSpPr>
+              <p:nvPr/>
+            </p:nvSpPr>
+            <p:spPr>
+              <a:xfrm>
+                <a:off x="4627493" y="981887"/>
+                <a:ext cx="7446711" cy="5253339"/>
+              </a:xfrm>
+              <a:prstGeom prst="rect">
+                <a:avLst/>
+              </a:prstGeom>
+            </p:spPr>
+            <p:txBody>
+              <a:bodyPr vert="horz" lIns="0" tIns="45720" rIns="0" bIns="45720" rtlCol="0">
+                <a:normAutofit/>
+              </a:bodyPr>
+              <a:lstStyle>
+                <a:lvl1pPr marL="271463" indent="-269875" algn="l" defTabSz="914400" rtl="0" eaLnBrk="1" latinLnBrk="0" hangingPunct="1">
+                  <a:lnSpc>
+                    <a:spcPct val="90000"/>
+                  </a:lnSpc>
+                  <a:spcBef>
+                    <a:spcPts val="1200"/>
+                  </a:spcBef>
+                  <a:spcAft>
+                    <a:spcPts val="200"/>
+                  </a:spcAft>
+                  <a:buClr>
+                    <a:schemeClr val="tx2"/>
+                  </a:buClr>
+                  <a:buSzPct val="80000"/>
+                  <a:buFont typeface="Wingdings" panose="05000000000000000000" pitchFamily="2" charset="2"/>
+                  <a:buChar char="q"/>
+                  <a:defRPr lang="fr-FR" sz="2800" kern="1200">
+                    <a:solidFill>
+                      <a:schemeClr val="tx1">
+                        <a:lumMod val="75000"/>
+                        <a:lumOff val="25000"/>
+                      </a:schemeClr>
+                    </a:solidFill>
+                    <a:latin typeface="+mn-lt"/>
+                    <a:ea typeface="+mn-ea"/>
+                    <a:cs typeface="+mn-cs"/>
+                  </a:defRPr>
+                </a:lvl1pPr>
+                <a:lvl2pPr marL="449263" indent="-249238" algn="l" defTabSz="914400" rtl="0" eaLnBrk="1" latinLnBrk="0" hangingPunct="1">
+                  <a:lnSpc>
+                    <a:spcPct val="90000"/>
+                  </a:lnSpc>
+                  <a:spcBef>
+                    <a:spcPts val="200"/>
+                  </a:spcBef>
+                  <a:spcAft>
+                    <a:spcPts val="400"/>
+                  </a:spcAft>
+                  <a:buClr>
+                    <a:schemeClr val="accent1"/>
+                  </a:buClr>
+                  <a:buSzPct val="80000"/>
+                  <a:buFont typeface="Wingdings" panose="05000000000000000000" pitchFamily="2" charset="2"/>
+                  <a:buChar char="q"/>
+                  <a:defRPr lang="fr-FR" sz="2400" kern="1200">
+                    <a:solidFill>
+                      <a:schemeClr val="tx1">
+                        <a:lumMod val="75000"/>
+                        <a:lumOff val="25000"/>
+                      </a:schemeClr>
+                    </a:solidFill>
+                    <a:latin typeface="+mn-lt"/>
+                    <a:ea typeface="+mn-ea"/>
+                    <a:cs typeface="+mn-cs"/>
+                  </a:defRPr>
+                </a:lvl2pPr>
+                <a:lvl3pPr marL="627063" indent="-242888" algn="l" defTabSz="914400" rtl="0" eaLnBrk="1" latinLnBrk="0" hangingPunct="1">
+                  <a:lnSpc>
+                    <a:spcPct val="90000"/>
+                  </a:lnSpc>
+                  <a:spcBef>
+                    <a:spcPts val="200"/>
+                  </a:spcBef>
+                  <a:spcAft>
+                    <a:spcPts val="400"/>
+                  </a:spcAft>
+                  <a:buClr>
+                    <a:schemeClr val="accent2"/>
+                  </a:buClr>
+                  <a:buSzPct val="80000"/>
+                  <a:buFont typeface="Wingdings" panose="05000000000000000000" pitchFamily="2" charset="2"/>
+                  <a:buChar char="q"/>
+                  <a:defRPr lang="fr-FR" sz="1800" kern="1200">
+                    <a:solidFill>
+                      <a:schemeClr val="tx1">
+                        <a:lumMod val="75000"/>
+                        <a:lumOff val="25000"/>
+                      </a:schemeClr>
+                    </a:solidFill>
+                    <a:latin typeface="+mn-lt"/>
+                    <a:ea typeface="+mn-ea"/>
+                    <a:cs typeface="+mn-cs"/>
+                  </a:defRPr>
+                </a:lvl3pPr>
+                <a:lvl4pPr marL="804863" indent="-238125" algn="l" defTabSz="914400" rtl="0" eaLnBrk="1" latinLnBrk="0" hangingPunct="1">
+                  <a:lnSpc>
+                    <a:spcPct val="90000"/>
+                  </a:lnSpc>
+                  <a:spcBef>
+                    <a:spcPts val="200"/>
+                  </a:spcBef>
+                  <a:spcAft>
+                    <a:spcPts val="400"/>
+                  </a:spcAft>
+                  <a:buClr>
+                    <a:schemeClr val="accent3"/>
+                  </a:buClr>
+                  <a:buSzPct val="80000"/>
+                  <a:buFont typeface="Wingdings" panose="05000000000000000000" pitchFamily="2" charset="2"/>
+                  <a:buChar char="q"/>
+                  <a:defRPr lang="fr-FR" sz="1800" kern="1200">
+                    <a:solidFill>
+                      <a:schemeClr val="tx1">
+                        <a:lumMod val="75000"/>
+                        <a:lumOff val="25000"/>
+                      </a:schemeClr>
+                    </a:solidFill>
+                    <a:latin typeface="+mn-lt"/>
+                    <a:ea typeface="+mn-ea"/>
+                    <a:cs typeface="+mn-cs"/>
+                  </a:defRPr>
+                </a:lvl4pPr>
+                <a:lvl5pPr marL="982663" indent="-233363" algn="l" defTabSz="914400" rtl="0" eaLnBrk="1" latinLnBrk="0" hangingPunct="1">
+                  <a:lnSpc>
+                    <a:spcPct val="90000"/>
+                  </a:lnSpc>
+                  <a:spcBef>
+                    <a:spcPts val="200"/>
+                  </a:spcBef>
+                  <a:spcAft>
+                    <a:spcPts val="400"/>
+                  </a:spcAft>
+                  <a:buClr>
+                    <a:schemeClr val="accent4"/>
+                  </a:buClr>
+                  <a:buSzPct val="80000"/>
+                  <a:buFont typeface="Wingdings" panose="05000000000000000000" pitchFamily="2" charset="2"/>
+                  <a:buChar char="q"/>
+                  <a:defRPr lang="en-US" sz="1800" kern="1200">
+                    <a:solidFill>
+                      <a:schemeClr val="tx1">
+                        <a:lumMod val="75000"/>
+                        <a:lumOff val="25000"/>
+                      </a:schemeClr>
+                    </a:solidFill>
+                    <a:latin typeface="+mn-lt"/>
+                    <a:ea typeface="+mn-ea"/>
+                    <a:cs typeface="+mn-cs"/>
+                  </a:defRPr>
+                </a:lvl5pPr>
+                <a:lvl6pPr marL="1100000" indent="-228600" algn="l" defTabSz="914400" rtl="0" eaLnBrk="1" latinLnBrk="0" hangingPunct="1">
+                  <a:lnSpc>
+                    <a:spcPct val="90000"/>
+                  </a:lnSpc>
+                  <a:spcBef>
+                    <a:spcPts val="200"/>
+                  </a:spcBef>
+                  <a:spcAft>
+                    <a:spcPts val="400"/>
+                  </a:spcAft>
+                  <a:buClr>
+                    <a:schemeClr val="accent1"/>
+                  </a:buClr>
+                  <a:buFont typeface="Calibri" pitchFamily="34" charset="0"/>
+                  <a:buChar char="◦"/>
+                  <a:defRPr sz="1400" kern="1200">
+                    <a:solidFill>
+                      <a:schemeClr val="tx1">
+                        <a:lumMod val="75000"/>
+                        <a:lumOff val="25000"/>
+                      </a:schemeClr>
+                    </a:solidFill>
+                    <a:latin typeface="+mn-lt"/>
+                    <a:ea typeface="+mn-ea"/>
+                    <a:cs typeface="+mn-cs"/>
+                  </a:defRPr>
+                </a:lvl6pPr>
+                <a:lvl7pPr marL="1300000" indent="-228600" algn="l" defTabSz="914400" rtl="0" eaLnBrk="1" latinLnBrk="0" hangingPunct="1">
+                  <a:lnSpc>
+                    <a:spcPct val="90000"/>
+                  </a:lnSpc>
+                  <a:spcBef>
+                    <a:spcPts val="200"/>
+                  </a:spcBef>
+                  <a:spcAft>
+                    <a:spcPts val="400"/>
+                  </a:spcAft>
+                  <a:buClr>
+                    <a:schemeClr val="accent1"/>
+                  </a:buClr>
+                  <a:buFont typeface="Calibri" pitchFamily="34" charset="0"/>
+                  <a:buChar char="◦"/>
+                  <a:defRPr sz="1400" kern="1200">
+                    <a:solidFill>
+                      <a:schemeClr val="tx1">
+                        <a:lumMod val="75000"/>
+                        <a:lumOff val="25000"/>
+                      </a:schemeClr>
+                    </a:solidFill>
+                    <a:latin typeface="+mn-lt"/>
+                    <a:ea typeface="+mn-ea"/>
+                    <a:cs typeface="+mn-cs"/>
+                  </a:defRPr>
+                </a:lvl7pPr>
+                <a:lvl8pPr marL="1500000" indent="-228600" algn="l" defTabSz="914400" rtl="0" eaLnBrk="1" latinLnBrk="0" hangingPunct="1">
+                  <a:lnSpc>
+                    <a:spcPct val="90000"/>
+                  </a:lnSpc>
+                  <a:spcBef>
+                    <a:spcPts val="200"/>
+                  </a:spcBef>
+                  <a:spcAft>
+                    <a:spcPts val="400"/>
+                  </a:spcAft>
+                  <a:buClr>
+                    <a:schemeClr val="accent1"/>
+                  </a:buClr>
+                  <a:buFont typeface="Calibri" pitchFamily="34" charset="0"/>
+                  <a:buChar char="◦"/>
+                  <a:defRPr sz="1400" kern="1200">
+                    <a:solidFill>
+                      <a:schemeClr val="tx1">
+                        <a:lumMod val="75000"/>
+                        <a:lumOff val="25000"/>
+                      </a:schemeClr>
+                    </a:solidFill>
+                    <a:latin typeface="+mn-lt"/>
+                    <a:ea typeface="+mn-ea"/>
+                    <a:cs typeface="+mn-cs"/>
+                  </a:defRPr>
+                </a:lvl8pPr>
+                <a:lvl9pPr marL="1700000" indent="-228600" algn="l" defTabSz="914400" rtl="0" eaLnBrk="1" latinLnBrk="0" hangingPunct="1">
+                  <a:lnSpc>
+                    <a:spcPct val="90000"/>
+                  </a:lnSpc>
+                  <a:spcBef>
+                    <a:spcPts val="200"/>
+                  </a:spcBef>
+                  <a:spcAft>
+                    <a:spcPts val="400"/>
+                  </a:spcAft>
+                  <a:buClr>
+                    <a:schemeClr val="accent1"/>
+                  </a:buClr>
+                  <a:buFont typeface="Calibri" pitchFamily="34" charset="0"/>
+                  <a:buChar char="◦"/>
+                  <a:defRPr sz="1400" kern="1200">
+                    <a:solidFill>
+                      <a:schemeClr val="tx1">
+                        <a:lumMod val="75000"/>
+                        <a:lumOff val="25000"/>
+                      </a:schemeClr>
+                    </a:solidFill>
+                    <a:latin typeface="+mn-lt"/>
+                    <a:ea typeface="+mn-ea"/>
+                    <a:cs typeface="+mn-cs"/>
+                  </a:defRPr>
+                </a:lvl9pPr>
+              </a:lstStyle>
+              <a:p>
+                <a:r>
+                  <a:rPr lang="fr-FR" dirty="0"/>
+                  <a:t>Hypothèse : </a:t>
+                </a:r>
+              </a:p>
+              <a:p>
+                <a:pPr lvl="1"/>
+                <a:r>
+                  <a:rPr lang="fr-FR" dirty="0"/>
+                  <a:t>Travail dans le plan de symétrie du RC4</a:t>
+                </a:r>
+              </a:p>
+              <a:p>
+                <a:pPr lvl="1"/>
+                <a:r>
+                  <a:rPr lang="fr-FR" dirty="0"/>
+                  <a:t>2 câbles supérieurs seulement </a:t>
+                </a:r>
+              </a:p>
+              <a:p>
+                <a:r>
+                  <a:rPr lang="fr-FR" dirty="0"/>
+                  <a:t>On isole le mobile</a:t>
+                </a:r>
+              </a:p>
+              <a:p>
+                <a:r>
+                  <a:rPr lang="fr-FR" dirty="0"/>
+                  <a:t>BAME </a:t>
+                </a:r>
+              </a:p>
+              <a:p>
+                <a:pPr lvl="1"/>
+                <a:r>
+                  <a:rPr lang="fr-FR" dirty="0"/>
+                  <a:t>Poids </a:t>
+                </a:r>
+                <a14:m>
+                  <m:oMath xmlns:m="http://schemas.openxmlformats.org/officeDocument/2006/math">
+                    <m:sSub>
+                      <m:sSubPr>
+                        <m:ctrlPr>
+                          <a:rPr lang="fr-FR" b="0" i="1" smtClean="0">
+                            <a:latin typeface="Cambria Math" panose="02040503050406030204" pitchFamily="18" charset="0"/>
+                          </a:rPr>
+                        </m:ctrlPr>
+                      </m:sSubPr>
+                      <m:e>
+                        <m:d>
+                          <m:dPr>
+                            <m:begChr m:val="{"/>
+                            <m:endChr m:val="}"/>
+                            <m:ctrlPr>
+                              <a:rPr lang="fr-FR" i="1" smtClean="0">
+                                <a:latin typeface="Cambria Math" panose="02040503050406030204" pitchFamily="18" charset="0"/>
+                              </a:rPr>
+                            </m:ctrlPr>
+                          </m:dPr>
+                          <m:e>
+                            <m:eqArr>
+                              <m:eqArrPr>
+                                <m:ctrlPr>
+                                  <a:rPr lang="fr-FR" i="1" smtClean="0">
+                                    <a:latin typeface="Cambria Math" panose="02040503050406030204" pitchFamily="18" charset="0"/>
+                                  </a:rPr>
+                                </m:ctrlPr>
+                              </m:eqArrPr>
+                              <m:e>
+                                <m:r>
+                                  <a:rPr lang="fr-FR" b="0" i="1" smtClean="0">
+                                    <a:latin typeface="Cambria Math" panose="02040503050406030204" pitchFamily="18" charset="0"/>
+                                  </a:rPr>
+                                  <m:t>−</m:t>
+                                </m:r>
+                                <m:r>
+                                  <a:rPr lang="fr-FR" b="0" i="1" smtClean="0">
+                                    <a:latin typeface="Cambria Math" panose="02040503050406030204" pitchFamily="18" charset="0"/>
+                                  </a:rPr>
+                                  <m:t>𝑀𝑔</m:t>
+                                </m:r>
+                                <m:acc>
+                                  <m:accPr>
+                                    <m:chr m:val="⃗"/>
+                                    <m:ctrlPr>
+                                      <a:rPr lang="fr-FR" b="0" i="1" smtClean="0">
+                                        <a:latin typeface="Cambria Math" panose="02040503050406030204" pitchFamily="18" charset="0"/>
+                                      </a:rPr>
+                                    </m:ctrlPr>
+                                  </m:accPr>
+                                  <m:e>
+                                    <m:r>
+                                      <a:rPr lang="fr-FR" b="0" i="1" smtClean="0">
+                                        <a:latin typeface="Cambria Math" panose="02040503050406030204" pitchFamily="18" charset="0"/>
+                                      </a:rPr>
+                                      <m:t>𝑦</m:t>
+                                    </m:r>
+                                  </m:e>
+                                </m:acc>
+                              </m:e>
+                              <m:e>
+                                <m:acc>
+                                  <m:accPr>
+                                    <m:chr m:val="⃗"/>
+                                    <m:ctrlPr>
+                                      <a:rPr lang="fr-FR" i="1">
+                                        <a:latin typeface="Cambria Math" panose="02040503050406030204" pitchFamily="18" charset="0"/>
+                                      </a:rPr>
+                                    </m:ctrlPr>
+                                  </m:accPr>
+                                  <m:e>
+                                    <m:r>
+                                      <a:rPr lang="fr-FR" b="0" i="1" smtClean="0">
+                                        <a:latin typeface="Cambria Math" panose="02040503050406030204" pitchFamily="18" charset="0"/>
+                                      </a:rPr>
+                                      <m:t>0</m:t>
+                                    </m:r>
+                                  </m:e>
+                                </m:acc>
+                              </m:e>
+                            </m:eqArr>
+                          </m:e>
+                        </m:d>
+                      </m:e>
+                      <m:sub>
+                        <m:r>
+                          <a:rPr lang="fr-FR" b="0" i="1" smtClean="0">
+                            <a:latin typeface="Cambria Math" panose="02040503050406030204" pitchFamily="18" charset="0"/>
+                          </a:rPr>
+                          <m:t>𝑀</m:t>
+                        </m:r>
+                      </m:sub>
+                    </m:sSub>
+                  </m:oMath>
+                </a14:m>
+                <a:endParaRPr lang="fr-FR" dirty="0"/>
+              </a:p>
+              <a:p>
+                <a:pPr lvl="1"/>
+                <a:r>
+                  <a:rPr lang="fr-FR" dirty="0"/>
+                  <a:t>Tension des deux câbles </a:t>
+                </a:r>
+                <a14:m>
+                  <m:oMath xmlns:m="http://schemas.openxmlformats.org/officeDocument/2006/math">
+                    <m:sSub>
+                      <m:sSubPr>
+                        <m:ctrlPr>
+                          <a:rPr lang="fr-FR" i="1">
+                            <a:latin typeface="Cambria Math" panose="02040503050406030204" pitchFamily="18" charset="0"/>
+                          </a:rPr>
+                        </m:ctrlPr>
+                      </m:sSubPr>
+                      <m:e>
+                        <m:d>
+                          <m:dPr>
+                            <m:begChr m:val="{"/>
+                            <m:endChr m:val="}"/>
+                            <m:ctrlPr>
+                              <a:rPr lang="fr-FR" i="1">
+                                <a:latin typeface="Cambria Math" panose="02040503050406030204" pitchFamily="18" charset="0"/>
+                              </a:rPr>
+                            </m:ctrlPr>
+                          </m:dPr>
+                          <m:e>
+                            <m:eqArr>
+                              <m:eqArrPr>
+                                <m:ctrlPr>
+                                  <a:rPr lang="fr-FR" i="1">
+                                    <a:latin typeface="Cambria Math" panose="02040503050406030204" pitchFamily="18" charset="0"/>
+                                  </a:rPr>
+                                </m:ctrlPr>
+                              </m:eqArrPr>
+                              <m:e>
+                                <m:sSub>
+                                  <m:sSubPr>
+                                    <m:ctrlPr>
+                                      <a:rPr lang="fr-FR" i="1">
+                                        <a:latin typeface="Cambria Math" panose="02040503050406030204" pitchFamily="18" charset="0"/>
+                                      </a:rPr>
+                                    </m:ctrlPr>
+                                  </m:sSubPr>
+                                  <m:e>
+                                    <m:r>
+                                      <a:rPr lang="fr-FR" i="1">
+                                        <a:latin typeface="Cambria Math" panose="02040503050406030204" pitchFamily="18" charset="0"/>
+                                      </a:rPr>
+                                      <m:t>𝐹</m:t>
+                                    </m:r>
+                                  </m:e>
+                                  <m:sub>
+                                    <m:r>
+                                      <a:rPr lang="fr-FR" i="1">
+                                        <a:latin typeface="Cambria Math" panose="02040503050406030204" pitchFamily="18" charset="0"/>
+                                      </a:rPr>
+                                      <m:t>𝐺</m:t>
+                                    </m:r>
+                                  </m:sub>
+                                </m:sSub>
+                                <m:acc>
+                                  <m:accPr>
+                                    <m:chr m:val="⃗"/>
+                                    <m:ctrlPr>
+                                      <a:rPr lang="fr-FR" i="1">
+                                        <a:latin typeface="Cambria Math" panose="02040503050406030204" pitchFamily="18" charset="0"/>
+                                      </a:rPr>
+                                    </m:ctrlPr>
+                                  </m:accPr>
+                                  <m:e>
+                                    <m:sSub>
+                                      <m:sSubPr>
+                                        <m:ctrlPr>
+                                          <a:rPr lang="fr-FR" i="1">
+                                            <a:latin typeface="Cambria Math" panose="02040503050406030204" pitchFamily="18" charset="0"/>
+                                          </a:rPr>
+                                        </m:ctrlPr>
+                                      </m:sSubPr>
+                                      <m:e>
+                                        <m:r>
+                                          <a:rPr lang="fr-FR" i="1">
+                                            <a:latin typeface="Cambria Math" panose="02040503050406030204" pitchFamily="18" charset="0"/>
+                                          </a:rPr>
+                                          <m:t>𝑢</m:t>
+                                        </m:r>
+                                      </m:e>
+                                      <m:sub>
+                                        <m:r>
+                                          <a:rPr lang="fr-FR" i="1">
+                                            <a:latin typeface="Cambria Math" panose="02040503050406030204" pitchFamily="18" charset="0"/>
+                                          </a:rPr>
+                                          <m:t>𝐻𝐺</m:t>
+                                        </m:r>
+                                      </m:sub>
+                                    </m:sSub>
+                                  </m:e>
+                                </m:acc>
+                              </m:e>
+                              <m:e>
+                                <m:acc>
+                                  <m:accPr>
+                                    <m:chr m:val="⃗"/>
+                                    <m:ctrlPr>
+                                      <a:rPr lang="fr-FR" i="1">
+                                        <a:latin typeface="Cambria Math" panose="02040503050406030204" pitchFamily="18" charset="0"/>
+                                      </a:rPr>
+                                    </m:ctrlPr>
+                                  </m:accPr>
+                                  <m:e>
+                                    <m:r>
+                                      <a:rPr lang="fr-FR" i="1">
+                                        <a:latin typeface="Cambria Math" panose="02040503050406030204" pitchFamily="18" charset="0"/>
+                                      </a:rPr>
+                                      <m:t>0</m:t>
+                                    </m:r>
+                                  </m:e>
+                                </m:acc>
+                              </m:e>
+                            </m:eqArr>
+                          </m:e>
+                        </m:d>
+                      </m:e>
+                      <m:sub>
+                        <m:sSub>
+                          <m:sSubPr>
+                            <m:ctrlPr>
+                              <a:rPr lang="fr-FR" i="1">
+                                <a:latin typeface="Cambria Math" panose="02040503050406030204" pitchFamily="18" charset="0"/>
+                              </a:rPr>
+                            </m:ctrlPr>
+                          </m:sSubPr>
+                          <m:e>
+                            <m:r>
+                              <a:rPr lang="fr-FR" i="1">
+                                <a:latin typeface="Cambria Math" panose="02040503050406030204" pitchFamily="18" charset="0"/>
+                              </a:rPr>
+                              <m:t>𝐴</m:t>
+                            </m:r>
+                          </m:e>
+                          <m:sub>
+                            <m:r>
+                              <a:rPr lang="fr-FR" i="1">
+                                <a:latin typeface="Cambria Math" panose="02040503050406030204" pitchFamily="18" charset="0"/>
+                              </a:rPr>
+                              <m:t>𝐻𝐺</m:t>
+                            </m:r>
+                          </m:sub>
+                        </m:sSub>
+                      </m:sub>
+                    </m:sSub>
+                  </m:oMath>
+                </a14:m>
+                <a:endParaRPr lang="fr-FR" dirty="0"/>
+              </a:p>
+              <a:p>
+                <a:pPr lvl="1"/>
+                <a:r>
+                  <a:rPr lang="fr-FR" dirty="0"/>
+                  <a:t>Tension des deux câbles </a:t>
+                </a:r>
+                <a14:m>
+                  <m:oMath xmlns:m="http://schemas.openxmlformats.org/officeDocument/2006/math">
+                    <m:sSub>
+                      <m:sSubPr>
+                        <m:ctrlPr>
+                          <a:rPr lang="fr-FR" i="1">
+                            <a:latin typeface="Cambria Math" panose="02040503050406030204" pitchFamily="18" charset="0"/>
+                          </a:rPr>
+                        </m:ctrlPr>
+                      </m:sSubPr>
+                      <m:e>
+                        <m:d>
+                          <m:dPr>
+                            <m:begChr m:val="{"/>
+                            <m:endChr m:val="}"/>
+                            <m:ctrlPr>
+                              <a:rPr lang="fr-FR" i="1">
+                                <a:latin typeface="Cambria Math" panose="02040503050406030204" pitchFamily="18" charset="0"/>
+                              </a:rPr>
+                            </m:ctrlPr>
+                          </m:dPr>
+                          <m:e>
+                            <m:eqArr>
+                              <m:eqArrPr>
+                                <m:ctrlPr>
+                                  <a:rPr lang="fr-FR" i="1">
+                                    <a:latin typeface="Cambria Math" panose="02040503050406030204" pitchFamily="18" charset="0"/>
+                                  </a:rPr>
+                                </m:ctrlPr>
+                              </m:eqArrPr>
+                              <m:e>
+                                <m:sSub>
+                                  <m:sSubPr>
+                                    <m:ctrlPr>
+                                      <a:rPr lang="fr-FR" i="1">
+                                        <a:latin typeface="Cambria Math" panose="02040503050406030204" pitchFamily="18" charset="0"/>
+                                      </a:rPr>
+                                    </m:ctrlPr>
+                                  </m:sSubPr>
+                                  <m:e>
+                                    <m:r>
+                                      <a:rPr lang="fr-FR" i="1">
+                                        <a:latin typeface="Cambria Math" panose="02040503050406030204" pitchFamily="18" charset="0"/>
+                                      </a:rPr>
+                                      <m:t>𝐹</m:t>
+                                    </m:r>
+                                  </m:e>
+                                  <m:sub>
+                                    <m:r>
+                                      <a:rPr lang="fr-FR" b="0" i="1" smtClean="0">
+                                        <a:latin typeface="Cambria Math" panose="02040503050406030204" pitchFamily="18" charset="0"/>
+                                      </a:rPr>
+                                      <m:t>𝐷</m:t>
+                                    </m:r>
+                                  </m:sub>
+                                </m:sSub>
+                                <m:acc>
+                                  <m:accPr>
+                                    <m:chr m:val="⃗"/>
+                                    <m:ctrlPr>
+                                      <a:rPr lang="fr-FR" i="1">
+                                        <a:latin typeface="Cambria Math" panose="02040503050406030204" pitchFamily="18" charset="0"/>
+                                      </a:rPr>
+                                    </m:ctrlPr>
+                                  </m:accPr>
+                                  <m:e>
+                                    <m:sSub>
+                                      <m:sSubPr>
+                                        <m:ctrlPr>
+                                          <a:rPr lang="fr-FR" i="1">
+                                            <a:latin typeface="Cambria Math" panose="02040503050406030204" pitchFamily="18" charset="0"/>
+                                          </a:rPr>
+                                        </m:ctrlPr>
+                                      </m:sSubPr>
+                                      <m:e>
+                                        <m:r>
+                                          <a:rPr lang="fr-FR" i="1">
+                                            <a:latin typeface="Cambria Math" panose="02040503050406030204" pitchFamily="18" charset="0"/>
+                                          </a:rPr>
+                                          <m:t>𝑢</m:t>
+                                        </m:r>
+                                      </m:e>
+                                      <m:sub>
+                                        <m:r>
+                                          <a:rPr lang="fr-FR" i="1">
+                                            <a:latin typeface="Cambria Math" panose="02040503050406030204" pitchFamily="18" charset="0"/>
+                                          </a:rPr>
+                                          <m:t>𝐻</m:t>
+                                        </m:r>
+                                        <m:r>
+                                          <a:rPr lang="fr-FR" b="0" i="1" smtClean="0">
+                                            <a:latin typeface="Cambria Math" panose="02040503050406030204" pitchFamily="18" charset="0"/>
+                                          </a:rPr>
+                                          <m:t>𝐷</m:t>
+                                        </m:r>
+                                      </m:sub>
+                                    </m:sSub>
+                                  </m:e>
+                                </m:acc>
+                              </m:e>
+                              <m:e>
+                                <m:acc>
+                                  <m:accPr>
+                                    <m:chr m:val="⃗"/>
+                                    <m:ctrlPr>
+                                      <a:rPr lang="fr-FR" i="1">
+                                        <a:latin typeface="Cambria Math" panose="02040503050406030204" pitchFamily="18" charset="0"/>
+                                      </a:rPr>
+                                    </m:ctrlPr>
+                                  </m:accPr>
+                                  <m:e>
+                                    <m:r>
+                                      <a:rPr lang="fr-FR" i="1">
+                                        <a:latin typeface="Cambria Math" panose="02040503050406030204" pitchFamily="18" charset="0"/>
+                                      </a:rPr>
+                                      <m:t>0</m:t>
+                                    </m:r>
+                                  </m:e>
+                                </m:acc>
+                              </m:e>
+                            </m:eqArr>
+                          </m:e>
+                        </m:d>
+                      </m:e>
+                      <m:sub>
+                        <m:sSub>
+                          <m:sSubPr>
+                            <m:ctrlPr>
+                              <a:rPr lang="fr-FR" i="1">
+                                <a:latin typeface="Cambria Math" panose="02040503050406030204" pitchFamily="18" charset="0"/>
+                              </a:rPr>
+                            </m:ctrlPr>
+                          </m:sSubPr>
+                          <m:e>
+                            <m:r>
+                              <a:rPr lang="fr-FR" i="1">
+                                <a:latin typeface="Cambria Math" panose="02040503050406030204" pitchFamily="18" charset="0"/>
+                              </a:rPr>
+                              <m:t>𝐴</m:t>
+                            </m:r>
+                          </m:e>
+                          <m:sub>
+                            <m:r>
+                              <a:rPr lang="fr-FR" i="1">
+                                <a:latin typeface="Cambria Math" panose="02040503050406030204" pitchFamily="18" charset="0"/>
+                              </a:rPr>
+                              <m:t>𝐻</m:t>
+                            </m:r>
+                            <m:r>
+                              <a:rPr lang="fr-FR" b="0" i="1" smtClean="0">
+                                <a:latin typeface="Cambria Math" panose="02040503050406030204" pitchFamily="18" charset="0"/>
+                              </a:rPr>
+                              <m:t>𝐷</m:t>
+                            </m:r>
+                          </m:sub>
+                        </m:sSub>
+                      </m:sub>
+                    </m:sSub>
+                  </m:oMath>
+                </a14:m>
+                <a:endParaRPr lang="fr-FR"/>
+              </a:p>
+              <a:p>
+                <a:pPr lvl="1"/>
+                <a:endParaRPr lang="fr-FR" dirty="0"/>
+              </a:p>
+              <a:p>
+                <a:pPr lvl="1"/>
+                <a:endParaRPr lang="fr-FR" dirty="0"/>
+              </a:p>
+              <a:p>
+                <a:endParaRPr lang="fr-FR" dirty="0"/>
+              </a:p>
+            </p:txBody>
+          </p:sp>
+        </mc:Choice>
+        <mc:Fallback>
+          <p:sp>
+            <p:nvSpPr>
+              <p:cNvPr id="41" name="Espace réservé du contenu 2">
+                <a:extLst>
+                  <a:ext uri="{FF2B5EF4-FFF2-40B4-BE49-F238E27FC236}">
+                    <a16:creationId xmlns:a16="http://schemas.microsoft.com/office/drawing/2014/main" id="{23C05DF7-71E0-9025-FB8A-4A6909978D01}"/>
+                  </a:ext>
+                </a:extLst>
+              </p:cNvPr>
+              <p:cNvSpPr txBox="1">
+                <a:spLocks noRot="1" noChangeAspect="1" noMove="1" noResize="1" noEditPoints="1" noAdjustHandles="1" noChangeArrowheads="1" noChangeShapeType="1" noTextEdit="1"/>
+              </p:cNvSpPr>
+              <p:nvPr/>
+            </p:nvSpPr>
+            <p:spPr>
+              <a:xfrm>
+                <a:off x="4627493" y="981887"/>
+                <a:ext cx="7446711" cy="5253339"/>
+              </a:xfrm>
+              <a:prstGeom prst="rect">
+                <a:avLst/>
+              </a:prstGeom>
+              <a:blipFill>
+                <a:blip r:embed="rId9"/>
+                <a:stretch>
+                  <a:fillRect l="-2128" t="-1856"/>
+                </a:stretch>
+              </a:blipFill>
+            </p:spPr>
+            <p:txBody>
+              <a:bodyPr/>
+              <a:lstStyle/>
+              <a:p>
+                <a:r>
+                  <a:rPr lang="fr-FR">
+                    <a:noFill/>
+                  </a:rPr>
+                  <a:t> </a:t>
+                </a:r>
+              </a:p>
+            </p:txBody>
+          </p:sp>
+        </mc:Fallback>
+      </mc:AlternateContent>
+    </p:spTree>
+    <p:extLst>
+      <p:ext uri="{BB962C8B-B14F-4D97-AF65-F5344CB8AC3E}">
+        <p14:creationId xmlns:p14="http://schemas.microsoft.com/office/powerpoint/2010/main" val="572886837"/>
+      </p:ext>
+    </p:extLst>
+  </p:cSld>
+  <p:clrMapOvr>
+    <a:masterClrMapping/>
+  </p:clrMapOvr>
+</p:sld>
+</file>
+
+<file path=ppt/slides/slide6.xml><?xml version="1.0" encoding="utf-8"?>
+<p:sld xmlns:a="http://schemas.openxmlformats.org/drawingml/2006/main" xmlns:r="http://schemas.openxmlformats.org/officeDocument/2006/relationships" xmlns:p="http://schemas.openxmlformats.org/presentationml/2006/main">
+  <p:cSld>
+    <p:spTree>
+      <p:nvGrpSpPr>
+        <p:cNvPr id="1" name=""/>
+        <p:cNvGrpSpPr/>
+        <p:nvPr/>
+      </p:nvGrpSpPr>
+      <p:grpSpPr>
+        <a:xfrm>
+          <a:off x="0" y="0"/>
+          <a:ext cx="0" cy="0"/>
+          <a:chOff x="0" y="0"/>
+          <a:chExt cx="0" cy="0"/>
+        </a:xfrm>
+      </p:grpSpPr>
+      <p:sp>
+        <p:nvSpPr>
+          <p:cNvPr id="2" name="Titre 1">
+            <a:extLst>
+              <a:ext uri="{FF2B5EF4-FFF2-40B4-BE49-F238E27FC236}">
+                <a16:creationId xmlns:a16="http://schemas.microsoft.com/office/drawing/2014/main" id="{F1558B99-2FB3-F1E8-7CA5-4A2C2D2BE1E2}"/>
+              </a:ext>
+            </a:extLst>
+          </p:cNvPr>
+          <p:cNvSpPr>
+            <a:spLocks noGrp="1"/>
+          </p:cNvSpPr>
+          <p:nvPr>
+            <p:ph type="title"/>
+          </p:nvPr>
+        </p:nvSpPr>
+        <p:spPr/>
+        <p:txBody>
+          <a:bodyPr/>
+          <a:lstStyle/>
+          <a:p>
+            <a:endParaRPr lang="fr-FR"/>
+          </a:p>
+        </p:txBody>
+      </p:sp>
+      <p:sp>
+        <p:nvSpPr>
+          <p:cNvPr id="3" name="Espace réservé du contenu 2">
+            <a:extLst>
+              <a:ext uri="{FF2B5EF4-FFF2-40B4-BE49-F238E27FC236}">
+                <a16:creationId xmlns:a16="http://schemas.microsoft.com/office/drawing/2014/main" id="{4A2EF6E9-540D-C357-B3FA-27BA15A12770}"/>
+              </a:ext>
+            </a:extLst>
+          </p:cNvPr>
+          <p:cNvSpPr>
+            <a:spLocks noGrp="1"/>
+          </p:cNvSpPr>
+          <p:nvPr>
+            <p:ph idx="1"/>
+          </p:nvPr>
+        </p:nvSpPr>
+        <p:spPr/>
+        <p:txBody>
+          <a:bodyPr/>
+          <a:lstStyle/>
+          <a:p>
+            <a:r>
+              <a:rPr lang="fr-FR" dirty="0"/>
+              <a:t> XXX</a:t>
+            </a:r>
+          </a:p>
+        </p:txBody>
+      </p:sp>
+    </p:spTree>
+    <p:extLst>
+      <p:ext uri="{BB962C8B-B14F-4D97-AF65-F5344CB8AC3E}">
+        <p14:creationId xmlns:p14="http://schemas.microsoft.com/office/powerpoint/2010/main" val="919436716"/>
+      </p:ext>
+    </p:extLst>
+  </p:cSld>
+  <p:clrMapOvr>
+    <a:masterClrMapping/>
+  </p:clrMapOvr>
+</p:sld>
+</file>
+
 <file path=ppt/theme/theme1.xml><?xml version="1.0" encoding="utf-8"?>
 <a:theme xmlns:a="http://schemas.openxmlformats.org/drawingml/2006/main" name="Rétrospective">
   <a:themeElements>
